--- a/docs/SageAI_Architecture_DeepDive.pptx
+++ b/docs/SageAI_Architecture_DeepDive.pptx
@@ -14,6 +14,9 @@
     <p:sldId id="262" r:id="rId13"/>
     <p:sldId id="263" r:id="rId14"/>
     <p:sldId id="264" r:id="rId15"/>
+    <p:sldId id="265" r:id="rId16"/>
+    <p:sldId id="266" r:id="rId17"/>
+    <p:sldId id="267" r:id="rId18"/>
   </p:sldIdLst>
   <p:sldSz cx="12188952" cy="6858000" type="screen4x3"/>
   <p:notesSz cx="6858000" cy="9144000"/>
@@ -4684,6 +4687,5315 @@
       <p:sp>
         <p:nvSpPr>
           <p:cNvPr id="45" name="TextBox 44"/>
+          <p:cNvSpPr txBox="1"/>
+          <p:nvPr/>
+        </p:nvSpPr>
+        <p:spPr>
+          <a:xfrm>
+            <a:off x="274320" y="6510528"/>
+            <a:ext cx="8229600" cy="274320"/>
+          </a:xfrm>
+          <a:prstGeom prst="rect">
+            <a:avLst/>
+          </a:prstGeom>
+          <a:noFill/>
+        </p:spPr>
+        <p:txBody>
+          <a:bodyPr wrap="square">
+            <a:spAutoFit/>
+          </a:bodyPr>
+          <a:lstStyle/>
+          <a:p>
+            <a:pPr algn="l"/>
+            <a:r>
+              <a:rPr sz="900" b="0" i="0">
+                <a:solidFill>
+                  <a:srgbClr val="4B5563"/>
+                </a:solidFill>
+              </a:rPr>
+              <a:t>SAGE[ai] — Architecture Deep Dive | github.com/Sumanharapanahalli/sage</a:t>
+            </a:r>
+          </a:p>
+        </p:txBody>
+      </p:sp>
+    </p:spTree>
+  </p:cSld>
+  <p:clrMapOvr>
+    <a:masterClrMapping/>
+  </p:clrMapOvr>
+</p:sld>
+</file>
+
+<file path=ppt/slides/slide10.xml><?xml version="1.0" encoding="utf-8"?>
+<p:sld xmlns:a="http://schemas.openxmlformats.org/drawingml/2006/main" xmlns:p="http://schemas.openxmlformats.org/presentationml/2006/main" xmlns:r="http://schemas.openxmlformats.org/officeDocument/2006/relationships">
+  <p:cSld>
+    <p:bg>
+      <p:bgPr>
+        <a:solidFill>
+          <a:srgbClr val="FAFAFA"/>
+        </a:solidFill>
+        <a:effectLst/>
+      </p:bgPr>
+    </p:bg>
+    <p:spTree>
+      <p:nvGrpSpPr>
+        <p:cNvPr id="1" name=""/>
+        <p:cNvGrpSpPr/>
+        <p:nvPr/>
+      </p:nvGrpSpPr>
+      <p:grpSpPr/>
+      <p:sp>
+        <p:nvSpPr>
+          <p:cNvPr id="2" name="Rectangle 1"/>
+          <p:cNvSpPr/>
+          <p:nvPr/>
+        </p:nvSpPr>
+        <p:spPr>
+          <a:xfrm>
+            <a:off x="0" y="0"/>
+            <a:ext cx="12188952" cy="1325880"/>
+          </a:xfrm>
+          <a:prstGeom prst="rect">
+            <a:avLst/>
+          </a:prstGeom>
+          <a:solidFill>
+            <a:srgbClr val="1F2A37"/>
+          </a:solidFill>
+          <a:ln>
+            <a:noFill/>
+          </a:ln>
+        </p:spPr>
+        <p:style>
+          <a:lnRef idx="1">
+            <a:schemeClr val="accent1"/>
+          </a:lnRef>
+          <a:fillRef idx="3">
+            <a:schemeClr val="accent1"/>
+          </a:fillRef>
+          <a:effectRef idx="2">
+            <a:schemeClr val="accent1"/>
+          </a:effectRef>
+          <a:fontRef idx="minor">
+            <a:schemeClr val="lt1"/>
+          </a:fontRef>
+        </p:style>
+        <p:txBody>
+          <a:bodyPr rtlCol="0" anchor="ctr"/>
+          <a:lstStyle/>
+          <a:p>
+            <a:pPr algn="ctr"/>
+          </a:p>
+        </p:txBody>
+      </p:sp>
+      <p:sp>
+        <p:nvSpPr>
+          <p:cNvPr id="3" name="TextBox 2"/>
+          <p:cNvSpPr txBox="1"/>
+          <p:nvPr/>
+        </p:nvSpPr>
+        <p:spPr>
+          <a:xfrm>
+            <a:off x="411480" y="109728"/>
+            <a:ext cx="11338560" cy="731520"/>
+          </a:xfrm>
+          <a:prstGeom prst="rect">
+            <a:avLst/>
+          </a:prstGeom>
+          <a:noFill/>
+        </p:spPr>
+        <p:txBody>
+          <a:bodyPr wrap="square">
+            <a:spAutoFit/>
+          </a:bodyPr>
+          <a:lstStyle/>
+          <a:p>
+            <a:pPr algn="l"/>
+            <a:r>
+              <a:rPr sz="3000" b="1" i="0">
+                <a:solidFill>
+                  <a:srgbClr val="FFFFFF"/>
+                </a:solidFill>
+              </a:rPr>
+              <a:t>Sandboxed Execution — 3-Tier Isolation Cascade</a:t>
+            </a:r>
+          </a:p>
+        </p:txBody>
+      </p:sp>
+      <p:sp>
+        <p:nvSpPr>
+          <p:cNvPr id="4" name="TextBox 3"/>
+          <p:cNvSpPr txBox="1"/>
+          <p:nvPr/>
+        </p:nvSpPr>
+        <p:spPr>
+          <a:xfrm>
+            <a:off x="411480" y="804672"/>
+            <a:ext cx="11338560" cy="438912"/>
+          </a:xfrm>
+          <a:prstGeom prst="rect">
+            <a:avLst/>
+          </a:prstGeom>
+          <a:noFill/>
+        </p:spPr>
+        <p:txBody>
+          <a:bodyPr wrap="square">
+            <a:spAutoFit/>
+          </a:bodyPr>
+          <a:lstStyle/>
+          <a:p>
+            <a:pPr algn="l"/>
+            <a:r>
+              <a:rPr sz="1600" b="0" i="0">
+                <a:solidFill>
+                  <a:srgbClr val="047857"/>
+                </a:solidFill>
+              </a:rPr>
+              <a:t>OpenShell (container) → SandboxRunner (local clone) → OpenSWE (autonomous coding)</a:t>
+            </a:r>
+          </a:p>
+        </p:txBody>
+      </p:sp>
+      <p:sp>
+        <p:nvSpPr>
+          <p:cNvPr id="5" name="Rectangle 4"/>
+          <p:cNvSpPr/>
+          <p:nvPr/>
+        </p:nvSpPr>
+        <p:spPr>
+          <a:xfrm>
+            <a:off x="365760" y="1554480"/>
+            <a:ext cx="3657600" cy="411480"/>
+          </a:xfrm>
+          <a:prstGeom prst="rect">
+            <a:avLst/>
+          </a:prstGeom>
+          <a:solidFill>
+            <a:srgbClr val="1F2A37"/>
+          </a:solidFill>
+          <a:ln>
+            <a:noFill/>
+          </a:ln>
+        </p:spPr>
+        <p:style>
+          <a:lnRef idx="1">
+            <a:schemeClr val="accent1"/>
+          </a:lnRef>
+          <a:fillRef idx="3">
+            <a:schemeClr val="accent1"/>
+          </a:fillRef>
+          <a:effectRef idx="2">
+            <a:schemeClr val="accent1"/>
+          </a:effectRef>
+          <a:fontRef idx="minor">
+            <a:schemeClr val="lt1"/>
+          </a:fontRef>
+        </p:style>
+        <p:txBody>
+          <a:bodyPr rtlCol="0" anchor="ctr"/>
+          <a:lstStyle/>
+          <a:p>
+            <a:pPr algn="ctr"/>
+          </a:p>
+        </p:txBody>
+      </p:sp>
+      <p:sp>
+        <p:nvSpPr>
+          <p:cNvPr id="6" name="TextBox 5"/>
+          <p:cNvSpPr txBox="1"/>
+          <p:nvPr/>
+        </p:nvSpPr>
+        <p:spPr>
+          <a:xfrm>
+            <a:off x="438912" y="1591056"/>
+            <a:ext cx="3511296" cy="338328"/>
+          </a:xfrm>
+          <a:prstGeom prst="rect">
+            <a:avLst/>
+          </a:prstGeom>
+          <a:noFill/>
+        </p:spPr>
+        <p:txBody>
+          <a:bodyPr wrap="square">
+            <a:spAutoFit/>
+          </a:bodyPr>
+          <a:lstStyle/>
+          <a:p>
+            <a:pPr algn="ctr"/>
+            <a:r>
+              <a:rPr sz="1100" b="1" i="0">
+                <a:solidFill>
+                  <a:srgbClr val="FFFFFF"/>
+                </a:solidFill>
+              </a:rPr>
+              <a:t>Tier 1: OpenShell</a:t>
+            </a:r>
+          </a:p>
+        </p:txBody>
+      </p:sp>
+      <p:sp>
+        <p:nvSpPr>
+          <p:cNvPr id="7" name="TextBox 6"/>
+          <p:cNvSpPr txBox="1"/>
+          <p:nvPr/>
+        </p:nvSpPr>
+        <p:spPr>
+          <a:xfrm>
+            <a:off x="457200" y="2011680"/>
+            <a:ext cx="3474720" cy="274320"/>
+          </a:xfrm>
+          <a:prstGeom prst="rect">
+            <a:avLst/>
+          </a:prstGeom>
+          <a:noFill/>
+        </p:spPr>
+        <p:txBody>
+          <a:bodyPr wrap="square">
+            <a:spAutoFit/>
+          </a:bodyPr>
+          <a:lstStyle/>
+          <a:p>
+            <a:pPr algn="ctr"/>
+            <a:r>
+              <a:rPr sz="1000" b="0" i="1">
+                <a:solidFill>
+                  <a:srgbClr val="4B5563"/>
+                </a:solidFill>
+              </a:rPr>
+              <a:t>NVIDIA container sandbox</a:t>
+            </a:r>
+          </a:p>
+        </p:txBody>
+      </p:sp>
+      <p:sp>
+        <p:nvSpPr>
+          <p:cNvPr id="8" name="TextBox 7"/>
+          <p:cNvSpPr txBox="1"/>
+          <p:nvPr/>
+        </p:nvSpPr>
+        <p:spPr>
+          <a:xfrm>
+            <a:off x="502920" y="2377440"/>
+            <a:ext cx="3383280" cy="237744"/>
+          </a:xfrm>
+          <a:prstGeom prst="rect">
+            <a:avLst/>
+          </a:prstGeom>
+          <a:noFill/>
+        </p:spPr>
+        <p:txBody>
+          <a:bodyPr wrap="square">
+            <a:spAutoFit/>
+          </a:bodyPr>
+          <a:lstStyle/>
+          <a:p>
+            <a:pPr algn="l"/>
+            <a:r>
+              <a:rPr sz="1000" b="0" i="0">
+                <a:solidFill>
+                  <a:srgbClr val="1F2A37"/>
+                </a:solidFill>
+              </a:rPr>
+              <a:t>• SSH-based execution inside container</a:t>
+            </a:r>
+          </a:p>
+        </p:txBody>
+      </p:sp>
+      <p:sp>
+        <p:nvSpPr>
+          <p:cNvPr id="9" name="TextBox 8"/>
+          <p:cNvSpPr txBox="1"/>
+          <p:nvPr/>
+        </p:nvSpPr>
+        <p:spPr>
+          <a:xfrm>
+            <a:off x="502920" y="2615184"/>
+            <a:ext cx="3383280" cy="237744"/>
+          </a:xfrm>
+          <a:prstGeom prst="rect">
+            <a:avLst/>
+          </a:prstGeom>
+          <a:noFill/>
+        </p:spPr>
+        <p:txBody>
+          <a:bodyPr wrap="square">
+            <a:spAutoFit/>
+          </a:bodyPr>
+          <a:lstStyle/>
+          <a:p>
+            <a:pPr algn="l"/>
+            <a:r>
+              <a:rPr sz="1000" b="0" i="0">
+                <a:solidFill>
+                  <a:srgbClr val="1F2A37"/>
+                </a:solidFill>
+              </a:rPr>
+              <a:t>• YAML security policies (commands, files, network)</a:t>
+            </a:r>
+          </a:p>
+        </p:txBody>
+      </p:sp>
+      <p:sp>
+        <p:nvSpPr>
+          <p:cNvPr id="10" name="TextBox 9"/>
+          <p:cNvSpPr txBox="1"/>
+          <p:nvPr/>
+        </p:nvSpPr>
+        <p:spPr>
+          <a:xfrm>
+            <a:off x="502920" y="2852928"/>
+            <a:ext cx="3383280" cy="237744"/>
+          </a:xfrm>
+          <a:prstGeom prst="rect">
+            <a:avLst/>
+          </a:prstGeom>
+          <a:noFill/>
+        </p:spPr>
+        <p:txBody>
+          <a:bodyPr wrap="square">
+            <a:spAutoFit/>
+          </a:bodyPr>
+          <a:lstStyle/>
+          <a:p>
+            <a:pPr algn="l"/>
+            <a:r>
+              <a:rPr sz="1000" b="0" i="0">
+                <a:solidFill>
+                  <a:srgbClr val="1F2A37"/>
+                </a:solidFill>
+              </a:rPr>
+              <a:t>• GPU-accelerated (ML training, inference)</a:t>
+            </a:r>
+          </a:p>
+        </p:txBody>
+      </p:sp>
+      <p:sp>
+        <p:nvSpPr>
+          <p:cNvPr id="11" name="TextBox 10"/>
+          <p:cNvSpPr txBox="1"/>
+          <p:nvPr/>
+        </p:nvSpPr>
+        <p:spPr>
+          <a:xfrm>
+            <a:off x="502920" y="3090672"/>
+            <a:ext cx="3383280" cy="237744"/>
+          </a:xfrm>
+          <a:prstGeom prst="rect">
+            <a:avLst/>
+          </a:prstGeom>
+          <a:noFill/>
+        </p:spPr>
+        <p:txBody>
+          <a:bodyPr wrap="square">
+            <a:spAutoFit/>
+          </a:bodyPr>
+          <a:lstStyle/>
+          <a:p>
+            <a:pPr algn="l"/>
+            <a:r>
+              <a:rPr sz="1000" b="0" i="0">
+                <a:solidFill>
+                  <a:srgbClr val="1F2A37"/>
+                </a:solidFill>
+              </a:rPr>
+              <a:t>• Full process + filesystem isolation</a:t>
+            </a:r>
+          </a:p>
+        </p:txBody>
+      </p:sp>
+      <p:sp>
+        <p:nvSpPr>
+          <p:cNvPr id="12" name="TextBox 11"/>
+          <p:cNvSpPr txBox="1"/>
+          <p:nvPr/>
+        </p:nvSpPr>
+        <p:spPr>
+          <a:xfrm>
+            <a:off x="502920" y="3328416"/>
+            <a:ext cx="3383280" cy="237744"/>
+          </a:xfrm>
+          <a:prstGeom prst="rect">
+            <a:avLst/>
+          </a:prstGeom>
+          <a:noFill/>
+        </p:spPr>
+        <p:txBody>
+          <a:bodyPr wrap="square">
+            <a:spAutoFit/>
+          </a:bodyPr>
+          <a:lstStyle/>
+          <a:p>
+            <a:pPr algn="l"/>
+            <a:r>
+              <a:rPr sz="1000" b="0" i="0">
+                <a:solidFill>
+                  <a:srgbClr val="1F2A37"/>
+                </a:solidFill>
+              </a:rPr>
+              <a:t>• Graceful degradation if unavailable</a:t>
+            </a:r>
+          </a:p>
+        </p:txBody>
+      </p:sp>
+      <p:sp>
+        <p:nvSpPr>
+          <p:cNvPr id="13" name="TextBox 12"/>
+          <p:cNvSpPr txBox="1"/>
+          <p:nvPr/>
+        </p:nvSpPr>
+        <p:spPr>
+          <a:xfrm>
+            <a:off x="4041648" y="1627632"/>
+            <a:ext cx="731520" cy="274320"/>
+          </a:xfrm>
+          <a:prstGeom prst="rect">
+            <a:avLst/>
+          </a:prstGeom>
+          <a:noFill/>
+        </p:spPr>
+        <p:txBody>
+          <a:bodyPr wrap="square">
+            <a:spAutoFit/>
+          </a:bodyPr>
+          <a:lstStyle/>
+          <a:p>
+            <a:pPr algn="ctr"/>
+            <a:r>
+              <a:rPr sz="900" b="1" i="0">
+                <a:solidFill>
+                  <a:srgbClr val="F59E0B"/>
+                </a:solidFill>
+              </a:rPr>
+              <a:t>fallback →</a:t>
+            </a:r>
+          </a:p>
+        </p:txBody>
+      </p:sp>
+      <p:sp>
+        <p:nvSpPr>
+          <p:cNvPr id="14" name="Rectangle 13"/>
+          <p:cNvSpPr/>
+          <p:nvPr/>
+        </p:nvSpPr>
+        <p:spPr>
+          <a:xfrm>
+            <a:off x="4297680" y="1554480"/>
+            <a:ext cx="3657600" cy="411480"/>
+          </a:xfrm>
+          <a:prstGeom prst="rect">
+            <a:avLst/>
+          </a:prstGeom>
+          <a:solidFill>
+            <a:srgbClr val="047857"/>
+          </a:solidFill>
+          <a:ln>
+            <a:noFill/>
+          </a:ln>
+        </p:spPr>
+        <p:style>
+          <a:lnRef idx="1">
+            <a:schemeClr val="accent1"/>
+          </a:lnRef>
+          <a:fillRef idx="3">
+            <a:schemeClr val="accent1"/>
+          </a:fillRef>
+          <a:effectRef idx="2">
+            <a:schemeClr val="accent1"/>
+          </a:effectRef>
+          <a:fontRef idx="minor">
+            <a:schemeClr val="lt1"/>
+          </a:fontRef>
+        </p:style>
+        <p:txBody>
+          <a:bodyPr rtlCol="0" anchor="ctr"/>
+          <a:lstStyle/>
+          <a:p>
+            <a:pPr algn="ctr"/>
+          </a:p>
+        </p:txBody>
+      </p:sp>
+      <p:sp>
+        <p:nvSpPr>
+          <p:cNvPr id="15" name="TextBox 14"/>
+          <p:cNvSpPr txBox="1"/>
+          <p:nvPr/>
+        </p:nvSpPr>
+        <p:spPr>
+          <a:xfrm>
+            <a:off x="4370832" y="1591056"/>
+            <a:ext cx="3511296" cy="338328"/>
+          </a:xfrm>
+          <a:prstGeom prst="rect">
+            <a:avLst/>
+          </a:prstGeom>
+          <a:noFill/>
+        </p:spPr>
+        <p:txBody>
+          <a:bodyPr wrap="square">
+            <a:spAutoFit/>
+          </a:bodyPr>
+          <a:lstStyle/>
+          <a:p>
+            <a:pPr algn="ctr"/>
+            <a:r>
+              <a:rPr sz="1100" b="1" i="0">
+                <a:solidFill>
+                  <a:srgbClr val="FFFFFF"/>
+                </a:solidFill>
+              </a:rPr>
+              <a:t>Tier 2: SandboxRunner</a:t>
+            </a:r>
+          </a:p>
+        </p:txBody>
+      </p:sp>
+      <p:sp>
+        <p:nvSpPr>
+          <p:cNvPr id="16" name="TextBox 15"/>
+          <p:cNvSpPr txBox="1"/>
+          <p:nvPr/>
+        </p:nvSpPr>
+        <p:spPr>
+          <a:xfrm>
+            <a:off x="4389120" y="2011680"/>
+            <a:ext cx="3474720" cy="274320"/>
+          </a:xfrm>
+          <a:prstGeom prst="rect">
+            <a:avLst/>
+          </a:prstGeom>
+          <a:noFill/>
+        </p:spPr>
+        <p:txBody>
+          <a:bodyPr wrap="square">
+            <a:spAutoFit/>
+          </a:bodyPr>
+          <a:lstStyle/>
+          <a:p>
+            <a:pPr algn="ctr"/>
+            <a:r>
+              <a:rPr sz="1000" b="0" i="1">
+                <a:solidFill>
+                  <a:srgbClr val="4B5563"/>
+                </a:solidFill>
+              </a:rPr>
+              <a:t>Local repo isolation</a:t>
+            </a:r>
+          </a:p>
+        </p:txBody>
+      </p:sp>
+      <p:sp>
+        <p:nvSpPr>
+          <p:cNvPr id="17" name="TextBox 16"/>
+          <p:cNvSpPr txBox="1"/>
+          <p:nvPr/>
+        </p:nvSpPr>
+        <p:spPr>
+          <a:xfrm>
+            <a:off x="4434840" y="2377440"/>
+            <a:ext cx="3383280" cy="237744"/>
+          </a:xfrm>
+          <a:prstGeom prst="rect">
+            <a:avLst/>
+          </a:prstGeom>
+          <a:noFill/>
+        </p:spPr>
+        <p:txBody>
+          <a:bodyPr wrap="square">
+            <a:spAutoFit/>
+          </a:bodyPr>
+          <a:lstStyle/>
+          <a:p>
+            <a:pPr algn="l"/>
+            <a:r>
+              <a:rPr sz="1000" b="0" i="0">
+                <a:solidFill>
+                  <a:srgbClr val="1F2A37"/>
+                </a:solidFill>
+              </a:rPr>
+              <a:t>• Clones solution repo → temp working dir</a:t>
+            </a:r>
+          </a:p>
+        </p:txBody>
+      </p:sp>
+      <p:sp>
+        <p:nvSpPr>
+          <p:cNvPr id="18" name="TextBox 17"/>
+          <p:cNvSpPr txBox="1"/>
+          <p:nvPr/>
+        </p:nvSpPr>
+        <p:spPr>
+          <a:xfrm>
+            <a:off x="4434840" y="2615184"/>
+            <a:ext cx="3383280" cy="237744"/>
+          </a:xfrm>
+          <a:prstGeom prst="rect">
+            <a:avLst/>
+          </a:prstGeom>
+          <a:noFill/>
+        </p:spPr>
+        <p:txBody>
+          <a:bodyPr wrap="square">
+            <a:spAutoFit/>
+          </a:bodyPr>
+          <a:lstStyle/>
+          <a:p>
+            <a:pPr algn="l"/>
+            <a:r>
+              <a:rPr sz="1000" b="0" i="0">
+                <a:solidFill>
+                  <a:srgbClr val="1F2A37"/>
+                </a:solidFill>
+              </a:rPr>
+              <a:t>• Creates isolated branch per execution</a:t>
+            </a:r>
+          </a:p>
+        </p:txBody>
+      </p:sp>
+      <p:sp>
+        <p:nvSpPr>
+          <p:cNvPr id="19" name="TextBox 18"/>
+          <p:cNvSpPr txBox="1"/>
+          <p:nvPr/>
+        </p:nvSpPr>
+        <p:spPr>
+          <a:xfrm>
+            <a:off x="4434840" y="2852928"/>
+            <a:ext cx="3383280" cy="237744"/>
+          </a:xfrm>
+          <a:prstGeom prst="rect">
+            <a:avLst/>
+          </a:prstGeom>
+          <a:noFill/>
+        </p:spPr>
+        <p:txBody>
+          <a:bodyPr wrap="square">
+            <a:spAutoFit/>
+          </a:bodyPr>
+          <a:lstStyle/>
+          <a:p>
+            <a:pPr algn="l"/>
+            <a:r>
+              <a:rPr sz="1000" b="0" i="0">
+                <a:solidFill>
+                  <a:srgbClr val="1F2A37"/>
+                </a:solidFill>
+              </a:rPr>
+              <a:t>• Restricts file ops to sandbox directory</a:t>
+            </a:r>
+          </a:p>
+        </p:txBody>
+      </p:sp>
+      <p:sp>
+        <p:nvSpPr>
+          <p:cNvPr id="20" name="TextBox 19"/>
+          <p:cNvSpPr txBox="1"/>
+          <p:nvPr/>
+        </p:nvSpPr>
+        <p:spPr>
+          <a:xfrm>
+            <a:off x="4434840" y="3090672"/>
+            <a:ext cx="3383280" cy="237744"/>
+          </a:xfrm>
+          <a:prstGeom prst="rect">
+            <a:avLst/>
+          </a:prstGeom>
+          <a:noFill/>
+        </p:spPr>
+        <p:txBody>
+          <a:bodyPr wrap="square">
+            <a:spAutoFit/>
+          </a:bodyPr>
+          <a:lstStyle/>
+          <a:p>
+            <a:pPr algn="l"/>
+            <a:r>
+              <a:rPr sz="1000" b="0" i="0">
+                <a:solidFill>
+                  <a:srgbClr val="1F2A37"/>
+                </a:solidFill>
+              </a:rPr>
+              <a:t>• Primitives: execute(), read_file(), write_file()</a:t>
+            </a:r>
+          </a:p>
+        </p:txBody>
+      </p:sp>
+      <p:sp>
+        <p:nvSpPr>
+          <p:cNvPr id="21" name="TextBox 20"/>
+          <p:cNvSpPr txBox="1"/>
+          <p:nvPr/>
+        </p:nvSpPr>
+        <p:spPr>
+          <a:xfrm>
+            <a:off x="4434840" y="3328416"/>
+            <a:ext cx="3383280" cy="237744"/>
+          </a:xfrm>
+          <a:prstGeom prst="rect">
+            <a:avLst/>
+          </a:prstGeom>
+          <a:noFill/>
+        </p:spPr>
+        <p:txBody>
+          <a:bodyPr wrap="square">
+            <a:spAutoFit/>
+          </a:bodyPr>
+          <a:lstStyle/>
+          <a:p>
+            <a:pPr algn="l"/>
+            <a:r>
+              <a:rPr sz="1000" b="0" i="0">
+                <a:solidFill>
+                  <a:srgbClr val="1F2A37"/>
+                </a:solidFill>
+              </a:rPr>
+              <a:t>• Configurable retain for debugging</a:t>
+            </a:r>
+          </a:p>
+        </p:txBody>
+      </p:sp>
+      <p:sp>
+        <p:nvSpPr>
+          <p:cNvPr id="22" name="TextBox 21"/>
+          <p:cNvSpPr txBox="1"/>
+          <p:nvPr/>
+        </p:nvSpPr>
+        <p:spPr>
+          <a:xfrm>
+            <a:off x="7973568" y="1627632"/>
+            <a:ext cx="731520" cy="274320"/>
+          </a:xfrm>
+          <a:prstGeom prst="rect">
+            <a:avLst/>
+          </a:prstGeom>
+          <a:noFill/>
+        </p:spPr>
+        <p:txBody>
+          <a:bodyPr wrap="square">
+            <a:spAutoFit/>
+          </a:bodyPr>
+          <a:lstStyle/>
+          <a:p>
+            <a:pPr algn="ctr"/>
+            <a:r>
+              <a:rPr sz="900" b="1" i="0">
+                <a:solidFill>
+                  <a:srgbClr val="F59E0B"/>
+                </a:solidFill>
+              </a:rPr>
+              <a:t>fallback →</a:t>
+            </a:r>
+          </a:p>
+        </p:txBody>
+      </p:sp>
+      <p:sp>
+        <p:nvSpPr>
+          <p:cNvPr id="23" name="Rectangle 22"/>
+          <p:cNvSpPr/>
+          <p:nvPr/>
+        </p:nvSpPr>
+        <p:spPr>
+          <a:xfrm>
+            <a:off x="8229600" y="1554480"/>
+            <a:ext cx="3657600" cy="411480"/>
+          </a:xfrm>
+          <a:prstGeom prst="rect">
+            <a:avLst/>
+          </a:prstGeom>
+          <a:solidFill>
+            <a:srgbClr val="10B981"/>
+          </a:solidFill>
+          <a:ln>
+            <a:noFill/>
+          </a:ln>
+        </p:spPr>
+        <p:style>
+          <a:lnRef idx="1">
+            <a:schemeClr val="accent1"/>
+          </a:lnRef>
+          <a:fillRef idx="3">
+            <a:schemeClr val="accent1"/>
+          </a:fillRef>
+          <a:effectRef idx="2">
+            <a:schemeClr val="accent1"/>
+          </a:effectRef>
+          <a:fontRef idx="minor">
+            <a:schemeClr val="lt1"/>
+          </a:fontRef>
+        </p:style>
+        <p:txBody>
+          <a:bodyPr rtlCol="0" anchor="ctr"/>
+          <a:lstStyle/>
+          <a:p>
+            <a:pPr algn="ctr"/>
+          </a:p>
+        </p:txBody>
+      </p:sp>
+      <p:sp>
+        <p:nvSpPr>
+          <p:cNvPr id="24" name="TextBox 23"/>
+          <p:cNvSpPr txBox="1"/>
+          <p:nvPr/>
+        </p:nvSpPr>
+        <p:spPr>
+          <a:xfrm>
+            <a:off x="8302752" y="1591056"/>
+            <a:ext cx="3511296" cy="338328"/>
+          </a:xfrm>
+          <a:prstGeom prst="rect">
+            <a:avLst/>
+          </a:prstGeom>
+          <a:noFill/>
+        </p:spPr>
+        <p:txBody>
+          <a:bodyPr wrap="square">
+            <a:spAutoFit/>
+          </a:bodyPr>
+          <a:lstStyle/>
+          <a:p>
+            <a:pPr algn="ctr"/>
+            <a:r>
+              <a:rPr sz="1100" b="1" i="0">
+                <a:solidFill>
+                  <a:srgbClr val="FFFFFF"/>
+                </a:solidFill>
+              </a:rPr>
+              <a:t>Tier 3: OpenSWE</a:t>
+            </a:r>
+          </a:p>
+        </p:txBody>
+      </p:sp>
+      <p:sp>
+        <p:nvSpPr>
+          <p:cNvPr id="25" name="TextBox 24"/>
+          <p:cNvSpPr txBox="1"/>
+          <p:nvPr/>
+        </p:nvSpPr>
+        <p:spPr>
+          <a:xfrm>
+            <a:off x="8321040" y="2011680"/>
+            <a:ext cx="3474720" cy="274320"/>
+          </a:xfrm>
+          <a:prstGeom prst="rect">
+            <a:avLst/>
+          </a:prstGeom>
+          <a:noFill/>
+        </p:spPr>
+        <p:txBody>
+          <a:bodyPr wrap="square">
+            <a:spAutoFit/>
+          </a:bodyPr>
+          <a:lstStyle/>
+          <a:p>
+            <a:pPr algn="ctr"/>
+            <a:r>
+              <a:rPr sz="1000" b="0" i="1">
+                <a:solidFill>
+                  <a:srgbClr val="4B5563"/>
+                </a:solidFill>
+              </a:rPr>
+              <a:t>Autonomous coding agent</a:t>
+            </a:r>
+          </a:p>
+        </p:txBody>
+      </p:sp>
+      <p:sp>
+        <p:nvSpPr>
+          <p:cNvPr id="26" name="TextBox 25"/>
+          <p:cNvSpPr txBox="1"/>
+          <p:nvPr/>
+        </p:nvSpPr>
+        <p:spPr>
+          <a:xfrm>
+            <a:off x="8366760" y="2377440"/>
+            <a:ext cx="3383280" cy="237744"/>
+          </a:xfrm>
+          <a:prstGeom prst="rect">
+            <a:avLst/>
+          </a:prstGeom>
+          <a:noFill/>
+        </p:spPr>
+        <p:txBody>
+          <a:bodyPr wrap="square">
+            <a:spAutoFit/>
+          </a:bodyPr>
+          <a:lstStyle/>
+          <a:p>
+            <a:pPr algn="l"/>
+            <a:r>
+              <a:rPr sz="1000" b="0" i="0">
+                <a:solidFill>
+                  <a:srgbClr val="1F2A37"/>
+                </a:solidFill>
+              </a:rPr>
+              <a:t>• Repo explore → implement → test → PR</a:t>
+            </a:r>
+          </a:p>
+        </p:txBody>
+      </p:sp>
+      <p:sp>
+        <p:nvSpPr>
+          <p:cNvPr id="27" name="TextBox 26"/>
+          <p:cNvSpPr txBox="1"/>
+          <p:nvPr/>
+        </p:nvSpPr>
+        <p:spPr>
+          <a:xfrm>
+            <a:off x="8366760" y="2615184"/>
+            <a:ext cx="3383280" cy="237744"/>
+          </a:xfrm>
+          <a:prstGeom prst="rect">
+            <a:avLst/>
+          </a:prstGeom>
+          <a:noFill/>
+        </p:spPr>
+        <p:txBody>
+          <a:bodyPr wrap="square">
+            <a:spAutoFit/>
+          </a:bodyPr>
+          <a:lstStyle/>
+          <a:p>
+            <a:pPr algn="l"/>
+            <a:r>
+              <a:rPr sz="1000" b="0" i="0">
+                <a:solidFill>
+                  <a:srgbClr val="1F2A37"/>
+                </a:solidFill>
+              </a:rPr>
+              <a:t>• Internal 3-tier: SWE agent → LangGraph → LLM direct</a:t>
+            </a:r>
+          </a:p>
+        </p:txBody>
+      </p:sp>
+      <p:sp>
+        <p:nvSpPr>
+          <p:cNvPr id="28" name="TextBox 27"/>
+          <p:cNvSpPr txBox="1"/>
+          <p:nvPr/>
+        </p:nvSpPr>
+        <p:spPr>
+          <a:xfrm>
+            <a:off x="8366760" y="2852928"/>
+            <a:ext cx="3383280" cy="237744"/>
+          </a:xfrm>
+          <a:prstGeom prst="rect">
+            <a:avLst/>
+          </a:prstGeom>
+          <a:noFill/>
+        </p:spPr>
+        <p:txBody>
+          <a:bodyPr wrap="square">
+            <a:spAutoFit/>
+          </a:bodyPr>
+          <a:lstStyle/>
+          <a:p>
+            <a:pPr algn="l"/>
+            <a:r>
+              <a:rPr sz="1000" b="0" i="0">
+                <a:solidFill>
+                  <a:srgbClr val="1F2A37"/>
+                </a:solidFill>
+              </a:rPr>
+              <a:t>• Unified output: {files_changed, tests_passed, pr_url}</a:t>
+            </a:r>
+          </a:p>
+        </p:txBody>
+      </p:sp>
+      <p:sp>
+        <p:nvSpPr>
+          <p:cNvPr id="29" name="TextBox 28"/>
+          <p:cNvSpPr txBox="1"/>
+          <p:nvPr/>
+        </p:nvSpPr>
+        <p:spPr>
+          <a:xfrm>
+            <a:off x="8366760" y="3090672"/>
+            <a:ext cx="3383280" cy="237744"/>
+          </a:xfrm>
+          <a:prstGeom prst="rect">
+            <a:avLst/>
+          </a:prstGeom>
+          <a:noFill/>
+        </p:spPr>
+        <p:txBody>
+          <a:bodyPr wrap="square">
+            <a:spAutoFit/>
+          </a:bodyPr>
+          <a:lstStyle/>
+          <a:p>
+            <a:pPr algn="l"/>
+            <a:r>
+              <a:rPr sz="1000" b="0" i="0">
+                <a:solidFill>
+                  <a:srgbClr val="1F2A37"/>
+                </a:solidFill>
+              </a:rPr>
+              <a:t>• Integrates with build orchestrator wave execution</a:t>
+            </a:r>
+          </a:p>
+        </p:txBody>
+      </p:sp>
+      <p:sp>
+        <p:nvSpPr>
+          <p:cNvPr id="30" name="Rectangle 29"/>
+          <p:cNvSpPr/>
+          <p:nvPr/>
+        </p:nvSpPr>
+        <p:spPr>
+          <a:xfrm>
+            <a:off x="365760" y="4389120"/>
+            <a:ext cx="11430000" cy="1828800"/>
+          </a:xfrm>
+          <a:prstGeom prst="rect">
+            <a:avLst/>
+          </a:prstGeom>
+          <a:solidFill>
+            <a:srgbClr val="1F2A37"/>
+          </a:solidFill>
+          <a:ln>
+            <a:noFill/>
+          </a:ln>
+        </p:spPr>
+        <p:style>
+          <a:lnRef idx="1">
+            <a:schemeClr val="accent1"/>
+          </a:lnRef>
+          <a:fillRef idx="3">
+            <a:schemeClr val="accent1"/>
+          </a:fillRef>
+          <a:effectRef idx="2">
+            <a:schemeClr val="accent1"/>
+          </a:effectRef>
+          <a:fontRef idx="minor">
+            <a:schemeClr val="lt1"/>
+          </a:fontRef>
+        </p:style>
+        <p:txBody>
+          <a:bodyPr rtlCol="0" anchor="ctr"/>
+          <a:lstStyle/>
+          <a:p>
+            <a:pPr algn="ctr"/>
+          </a:p>
+        </p:txBody>
+      </p:sp>
+      <p:sp>
+        <p:nvSpPr>
+          <p:cNvPr id="31" name="Rectangle 30"/>
+          <p:cNvSpPr/>
+          <p:nvPr/>
+        </p:nvSpPr>
+        <p:spPr>
+          <a:xfrm>
+            <a:off x="548640" y="4480560"/>
+            <a:ext cx="3200400" cy="256032"/>
+          </a:xfrm>
+          <a:prstGeom prst="rect">
+            <a:avLst/>
+          </a:prstGeom>
+          <a:solidFill>
+            <a:srgbClr val="10B981"/>
+          </a:solidFill>
+          <a:ln>
+            <a:noFill/>
+          </a:ln>
+        </p:spPr>
+        <p:style>
+          <a:lnRef idx="1">
+            <a:schemeClr val="accent1"/>
+          </a:lnRef>
+          <a:fillRef idx="3">
+            <a:schemeClr val="accent1"/>
+          </a:fillRef>
+          <a:effectRef idx="2">
+            <a:schemeClr val="accent1"/>
+          </a:effectRef>
+          <a:fontRef idx="minor">
+            <a:schemeClr val="lt1"/>
+          </a:fontRef>
+        </p:style>
+        <p:txBody>
+          <a:bodyPr rtlCol="0" anchor="ctr"/>
+          <a:lstStyle/>
+          <a:p>
+            <a:pPr algn="ctr"/>
+          </a:p>
+        </p:txBody>
+      </p:sp>
+      <p:sp>
+        <p:nvSpPr>
+          <p:cNvPr id="32" name="TextBox 31"/>
+          <p:cNvSpPr txBox="1"/>
+          <p:nvPr/>
+        </p:nvSpPr>
+        <p:spPr>
+          <a:xfrm>
+            <a:off x="603504" y="4498848"/>
+            <a:ext cx="3090672" cy="219456"/>
+          </a:xfrm>
+          <a:prstGeom prst="rect">
+            <a:avLst/>
+          </a:prstGeom>
+          <a:noFill/>
+        </p:spPr>
+        <p:txBody>
+          <a:bodyPr wrap="square">
+            <a:spAutoFit/>
+          </a:bodyPr>
+          <a:lstStyle/>
+          <a:p>
+            <a:pPr algn="ctr"/>
+            <a:r>
+              <a:rPr sz="1000" b="1" i="0">
+                <a:solidFill>
+                  <a:srgbClr val="FFFFFF"/>
+                </a:solidFill>
+              </a:rPr>
+              <a:t>Cascade Logic (build_orchestrator.py)</a:t>
+            </a:r>
+          </a:p>
+        </p:txBody>
+      </p:sp>
+      <p:sp>
+        <p:nvSpPr>
+          <p:cNvPr id="33" name="TextBox 32"/>
+          <p:cNvSpPr txBox="1"/>
+          <p:nvPr/>
+        </p:nvSpPr>
+        <p:spPr>
+          <a:xfrm>
+            <a:off x="548640" y="4800600"/>
+            <a:ext cx="10972800" cy="237744"/>
+          </a:xfrm>
+          <a:prstGeom prst="rect">
+            <a:avLst/>
+          </a:prstGeom>
+          <a:noFill/>
+        </p:spPr>
+        <p:txBody>
+          <a:bodyPr wrap="square">
+            <a:spAutoFit/>
+          </a:bodyPr>
+          <a:lstStyle/>
+          <a:p>
+            <a:pPr algn="l"/>
+            <a:r>
+              <a:rPr sz="1000" b="0" i="0">
+                <a:solidFill>
+                  <a:srgbClr val="D1FAE5"/>
+                </a:solidFill>
+              </a:rPr>
+              <a:t>1. Try OpenShell: if NVIDIA container available + task needs isolation → SSH exec in container</a:t>
+            </a:r>
+          </a:p>
+        </p:txBody>
+      </p:sp>
+      <p:sp>
+        <p:nvSpPr>
+          <p:cNvPr id="34" name="TextBox 33"/>
+          <p:cNvSpPr txBox="1"/>
+          <p:nvPr/>
+        </p:nvSpPr>
+        <p:spPr>
+          <a:xfrm>
+            <a:off x="548640" y="5038344"/>
+            <a:ext cx="10972800" cy="237744"/>
+          </a:xfrm>
+          <a:prstGeom prst="rect">
+            <a:avLst/>
+          </a:prstGeom>
+          <a:noFill/>
+        </p:spPr>
+        <p:txBody>
+          <a:bodyPr wrap="square">
+            <a:spAutoFit/>
+          </a:bodyPr>
+          <a:lstStyle/>
+          <a:p>
+            <a:pPr algn="l"/>
+            <a:r>
+              <a:rPr sz="1000" b="0" i="0">
+                <a:solidFill>
+                  <a:srgbClr val="D1FAE5"/>
+                </a:solidFill>
+              </a:rPr>
+              <a:t>2. Fallback to SandboxRunner: clone repo, isolate branch, execute locally</a:t>
+            </a:r>
+          </a:p>
+        </p:txBody>
+      </p:sp>
+      <p:sp>
+        <p:nvSpPr>
+          <p:cNvPr id="35" name="TextBox 34"/>
+          <p:cNvSpPr txBox="1"/>
+          <p:nvPr/>
+        </p:nvSpPr>
+        <p:spPr>
+          <a:xfrm>
+            <a:off x="548640" y="5276088"/>
+            <a:ext cx="10972800" cy="237744"/>
+          </a:xfrm>
+          <a:prstGeom prst="rect">
+            <a:avLst/>
+          </a:prstGeom>
+          <a:noFill/>
+        </p:spPr>
+        <p:txBody>
+          <a:bodyPr wrap="square">
+            <a:spAutoFit/>
+          </a:bodyPr>
+          <a:lstStyle/>
+          <a:p>
+            <a:pPr algn="l"/>
+            <a:r>
+              <a:rPr sz="1000" b="0" i="0">
+                <a:solidFill>
+                  <a:srgbClr val="D1FAE5"/>
+                </a:solidFill>
+              </a:rPr>
+              <a:t>3. Fallback to OpenSWE: autonomous coding agent (explore → implement → test → PR)</a:t>
+            </a:r>
+          </a:p>
+        </p:txBody>
+      </p:sp>
+      <p:sp>
+        <p:nvSpPr>
+          <p:cNvPr id="36" name="TextBox 35"/>
+          <p:cNvSpPr txBox="1"/>
+          <p:nvPr/>
+        </p:nvSpPr>
+        <p:spPr>
+          <a:xfrm>
+            <a:off x="548640" y="5513832"/>
+            <a:ext cx="10972800" cy="237744"/>
+          </a:xfrm>
+          <a:prstGeom prst="rect">
+            <a:avLst/>
+          </a:prstGeom>
+          <a:noFill/>
+        </p:spPr>
+        <p:txBody>
+          <a:bodyPr wrap="square">
+            <a:spAutoFit/>
+          </a:bodyPr>
+          <a:lstStyle/>
+          <a:p>
+            <a:pPr algn="l"/>
+            <a:r>
+              <a:rPr sz="1000" b="0" i="0">
+                <a:solidFill>
+                  <a:srgbClr val="D1FAE5"/>
+                </a:solidFill>
+              </a:rPr>
+              <a:t>4. Each tier returns same format: {success, output, files_changed} — orchestrator is tier-agnostic</a:t>
+            </a:r>
+          </a:p>
+        </p:txBody>
+      </p:sp>
+      <p:sp>
+        <p:nvSpPr>
+          <p:cNvPr id="37" name="TextBox 36"/>
+          <p:cNvSpPr txBox="1"/>
+          <p:nvPr/>
+        </p:nvSpPr>
+        <p:spPr>
+          <a:xfrm>
+            <a:off x="548640" y="5751576"/>
+            <a:ext cx="10972800" cy="237744"/>
+          </a:xfrm>
+          <a:prstGeom prst="rect">
+            <a:avLst/>
+          </a:prstGeom>
+          <a:noFill/>
+        </p:spPr>
+        <p:txBody>
+          <a:bodyPr wrap="square">
+            <a:spAutoFit/>
+          </a:bodyPr>
+          <a:lstStyle/>
+          <a:p>
+            <a:pPr algn="l"/>
+            <a:r>
+              <a:rPr sz="1000" b="0" i="0">
+                <a:solidFill>
+                  <a:srgbClr val="D1FAE5"/>
+                </a:solidFill>
+              </a:rPr>
+              <a:t/>
+            </a:r>
+          </a:p>
+        </p:txBody>
+      </p:sp>
+      <p:sp>
+        <p:nvSpPr>
+          <p:cNvPr id="38" name="TextBox 37"/>
+          <p:cNvSpPr txBox="1"/>
+          <p:nvPr/>
+        </p:nvSpPr>
+        <p:spPr>
+          <a:xfrm>
+            <a:off x="548640" y="5989320"/>
+            <a:ext cx="10972800" cy="237744"/>
+          </a:xfrm>
+          <a:prstGeom prst="rect">
+            <a:avLst/>
+          </a:prstGeom>
+          <a:noFill/>
+        </p:spPr>
+        <p:txBody>
+          <a:bodyPr wrap="square">
+            <a:spAutoFit/>
+          </a:bodyPr>
+          <a:lstStyle/>
+          <a:p>
+            <a:pPr algn="l"/>
+            <a:r>
+              <a:rPr sz="1000" b="0" i="0">
+                <a:solidFill>
+                  <a:srgbClr val="D1FAE5"/>
+                </a:solidFill>
+              </a:rPr>
+              <a:t>Key files: openshell_runner.py (Tier 1), sandbox_runner.py (Tier 2), openswe_runner.py (Tier 3)</a:t>
+            </a:r>
+          </a:p>
+        </p:txBody>
+      </p:sp>
+      <p:sp>
+        <p:nvSpPr>
+          <p:cNvPr id="39" name="Rectangle 38"/>
+          <p:cNvSpPr/>
+          <p:nvPr/>
+        </p:nvSpPr>
+        <p:spPr>
+          <a:xfrm>
+            <a:off x="0" y="6492240"/>
+            <a:ext cx="12188952" cy="365760"/>
+          </a:xfrm>
+          <a:prstGeom prst="rect">
+            <a:avLst/>
+          </a:prstGeom>
+          <a:solidFill>
+            <a:srgbClr val="1F2A37"/>
+          </a:solidFill>
+          <a:ln>
+            <a:noFill/>
+          </a:ln>
+        </p:spPr>
+        <p:style>
+          <a:lnRef idx="1">
+            <a:schemeClr val="accent1"/>
+          </a:lnRef>
+          <a:fillRef idx="3">
+            <a:schemeClr val="accent1"/>
+          </a:fillRef>
+          <a:effectRef idx="2">
+            <a:schemeClr val="accent1"/>
+          </a:effectRef>
+          <a:fontRef idx="minor">
+            <a:schemeClr val="lt1"/>
+          </a:fontRef>
+        </p:style>
+        <p:txBody>
+          <a:bodyPr rtlCol="0" anchor="ctr"/>
+          <a:lstStyle/>
+          <a:p>
+            <a:pPr algn="ctr"/>
+          </a:p>
+        </p:txBody>
+      </p:sp>
+      <p:sp>
+        <p:nvSpPr>
+          <p:cNvPr id="40" name="TextBox 39"/>
+          <p:cNvSpPr txBox="1"/>
+          <p:nvPr/>
+        </p:nvSpPr>
+        <p:spPr>
+          <a:xfrm>
+            <a:off x="274320" y="6510528"/>
+            <a:ext cx="8229600" cy="274320"/>
+          </a:xfrm>
+          <a:prstGeom prst="rect">
+            <a:avLst/>
+          </a:prstGeom>
+          <a:noFill/>
+        </p:spPr>
+        <p:txBody>
+          <a:bodyPr wrap="square">
+            <a:spAutoFit/>
+          </a:bodyPr>
+          <a:lstStyle/>
+          <a:p>
+            <a:pPr algn="l"/>
+            <a:r>
+              <a:rPr sz="900" b="0" i="0">
+                <a:solidFill>
+                  <a:srgbClr val="4B5563"/>
+                </a:solidFill>
+              </a:rPr>
+              <a:t>SAGE[ai] — Architecture Deep Dive | github.com/Sumanharapanahalli/sage</a:t>
+            </a:r>
+          </a:p>
+        </p:txBody>
+      </p:sp>
+    </p:spTree>
+  </p:cSld>
+  <p:clrMapOvr>
+    <a:masterClrMapping/>
+  </p:clrMapOvr>
+</p:sld>
+</file>
+
+<file path=ppt/slides/slide11.xml><?xml version="1.0" encoding="utf-8"?>
+<p:sld xmlns:a="http://schemas.openxmlformats.org/drawingml/2006/main" xmlns:p="http://schemas.openxmlformats.org/presentationml/2006/main" xmlns:r="http://schemas.openxmlformats.org/officeDocument/2006/relationships">
+  <p:cSld>
+    <p:bg>
+      <p:bgPr>
+        <a:solidFill>
+          <a:srgbClr val="FAFAFA"/>
+        </a:solidFill>
+        <a:effectLst/>
+      </p:bgPr>
+    </p:bg>
+    <p:spTree>
+      <p:nvGrpSpPr>
+        <p:cNvPr id="1" name=""/>
+        <p:cNvGrpSpPr/>
+        <p:nvPr/>
+      </p:nvGrpSpPr>
+      <p:grpSpPr/>
+      <p:sp>
+        <p:nvSpPr>
+          <p:cNvPr id="2" name="Rectangle 1"/>
+          <p:cNvSpPr/>
+          <p:nvPr/>
+        </p:nvSpPr>
+        <p:spPr>
+          <a:xfrm>
+            <a:off x="0" y="0"/>
+            <a:ext cx="12188952" cy="1325880"/>
+          </a:xfrm>
+          <a:prstGeom prst="rect">
+            <a:avLst/>
+          </a:prstGeom>
+          <a:solidFill>
+            <a:srgbClr val="1F2A37"/>
+          </a:solidFill>
+          <a:ln>
+            <a:noFill/>
+          </a:ln>
+        </p:spPr>
+        <p:style>
+          <a:lnRef idx="1">
+            <a:schemeClr val="accent1"/>
+          </a:lnRef>
+          <a:fillRef idx="3">
+            <a:schemeClr val="accent1"/>
+          </a:fillRef>
+          <a:effectRef idx="2">
+            <a:schemeClr val="accent1"/>
+          </a:effectRef>
+          <a:fontRef idx="minor">
+            <a:schemeClr val="lt1"/>
+          </a:fontRef>
+        </p:style>
+        <p:txBody>
+          <a:bodyPr rtlCol="0" anchor="ctr"/>
+          <a:lstStyle/>
+          <a:p>
+            <a:pPr algn="ctr"/>
+          </a:p>
+        </p:txBody>
+      </p:sp>
+      <p:sp>
+        <p:nvSpPr>
+          <p:cNvPr id="3" name="TextBox 2"/>
+          <p:cNvSpPr txBox="1"/>
+          <p:nvPr/>
+        </p:nvSpPr>
+        <p:spPr>
+          <a:xfrm>
+            <a:off x="411480" y="109728"/>
+            <a:ext cx="11338560" cy="731520"/>
+          </a:xfrm>
+          <a:prstGeom prst="rect">
+            <a:avLst/>
+          </a:prstGeom>
+          <a:noFill/>
+        </p:spPr>
+        <p:txBody>
+          <a:bodyPr wrap="square">
+            <a:spAutoFit/>
+          </a:bodyPr>
+          <a:lstStyle/>
+          <a:p>
+            <a:pPr algn="l"/>
+            <a:r>
+              <a:rPr sz="3000" b="1" i="0">
+                <a:solidFill>
+                  <a:srgbClr val="FFFFFF"/>
+                </a:solidFill>
+              </a:rPr>
+              <a:t>Agentic Patterns — 0→1 Greenfield Build</a:t>
+            </a:r>
+          </a:p>
+        </p:txBody>
+      </p:sp>
+      <p:sp>
+        <p:nvSpPr>
+          <p:cNvPr id="4" name="TextBox 3"/>
+          <p:cNvSpPr txBox="1"/>
+          <p:nvPr/>
+        </p:nvSpPr>
+        <p:spPr>
+          <a:xfrm>
+            <a:off x="411480" y="804672"/>
+            <a:ext cx="11338560" cy="438912"/>
+          </a:xfrm>
+          <a:prstGeom prst="rect">
+            <a:avLst/>
+          </a:prstGeom>
+          <a:noFill/>
+        </p:spPr>
+        <p:txBody>
+          <a:bodyPr wrap="square">
+            <a:spAutoFit/>
+          </a:bodyPr>
+          <a:lstStyle/>
+          <a:p>
+            <a:pPr algn="l"/>
+            <a:r>
+              <a:rPr sz="1600" b="0" i="0">
+                <a:solidFill>
+                  <a:srgbClr val="047857"/>
+                </a:solidFill>
+              </a:rPr>
+              <a:t>Idea → Domain Detection → Decomposition → Critic → HITL → Wave Build → Ship</a:t>
+            </a:r>
+          </a:p>
+        </p:txBody>
+      </p:sp>
+      <p:sp>
+        <p:nvSpPr>
+          <p:cNvPr id="5" name="Rectangle 4"/>
+          <p:cNvSpPr/>
+          <p:nvPr/>
+        </p:nvSpPr>
+        <p:spPr>
+          <a:xfrm>
+            <a:off x="365760" y="1508760"/>
+            <a:ext cx="2286000" cy="256032"/>
+          </a:xfrm>
+          <a:prstGeom prst="rect">
+            <a:avLst/>
+          </a:prstGeom>
+          <a:solidFill>
+            <a:srgbClr val="10B981"/>
+          </a:solidFill>
+          <a:ln>
+            <a:noFill/>
+          </a:ln>
+        </p:spPr>
+        <p:style>
+          <a:lnRef idx="1">
+            <a:schemeClr val="accent1"/>
+          </a:lnRef>
+          <a:fillRef idx="3">
+            <a:schemeClr val="accent1"/>
+          </a:fillRef>
+          <a:effectRef idx="2">
+            <a:schemeClr val="accent1"/>
+          </a:effectRef>
+          <a:fontRef idx="minor">
+            <a:schemeClr val="lt1"/>
+          </a:fontRef>
+        </p:style>
+        <p:txBody>
+          <a:bodyPr rtlCol="0" anchor="ctr"/>
+          <a:lstStyle/>
+          <a:p>
+            <a:pPr algn="ctr"/>
+          </a:p>
+        </p:txBody>
+      </p:sp>
+      <p:sp>
+        <p:nvSpPr>
+          <p:cNvPr id="6" name="TextBox 5"/>
+          <p:cNvSpPr txBox="1"/>
+          <p:nvPr/>
+        </p:nvSpPr>
+        <p:spPr>
+          <a:xfrm>
+            <a:off x="420624" y="1527048"/>
+            <a:ext cx="2176272" cy="219456"/>
+          </a:xfrm>
+          <a:prstGeom prst="rect">
+            <a:avLst/>
+          </a:prstGeom>
+          <a:noFill/>
+        </p:spPr>
+        <p:txBody>
+          <a:bodyPr wrap="square">
+            <a:spAutoFit/>
+          </a:bodyPr>
+          <a:lstStyle/>
+          <a:p>
+            <a:pPr algn="ctr"/>
+            <a:r>
+              <a:rPr sz="1000" b="1" i="0">
+                <a:solidFill>
+                  <a:srgbClr val="FFFFFF"/>
+                </a:solidFill>
+              </a:rPr>
+              <a:t>0→1 Pipeline Stages</a:t>
+            </a:r>
+          </a:p>
+        </p:txBody>
+      </p:sp>
+      <p:sp>
+        <p:nvSpPr>
+          <p:cNvPr id="7" name="Rectangle 6"/>
+          <p:cNvSpPr/>
+          <p:nvPr/>
+        </p:nvSpPr>
+        <p:spPr>
+          <a:xfrm>
+            <a:off x="457200" y="1828800"/>
+            <a:ext cx="2560320" cy="292608"/>
+          </a:xfrm>
+          <a:prstGeom prst="rect">
+            <a:avLst/>
+          </a:prstGeom>
+          <a:solidFill>
+            <a:srgbClr val="1F2A37"/>
+          </a:solidFill>
+          <a:ln>
+            <a:noFill/>
+          </a:ln>
+        </p:spPr>
+        <p:style>
+          <a:lnRef idx="1">
+            <a:schemeClr val="accent1"/>
+          </a:lnRef>
+          <a:fillRef idx="3">
+            <a:schemeClr val="accent1"/>
+          </a:fillRef>
+          <a:effectRef idx="2">
+            <a:schemeClr val="accent1"/>
+          </a:effectRef>
+          <a:fontRef idx="minor">
+            <a:schemeClr val="lt1"/>
+          </a:fontRef>
+        </p:style>
+        <p:txBody>
+          <a:bodyPr rtlCol="0" anchor="ctr"/>
+          <a:lstStyle/>
+          <a:p>
+            <a:pPr algn="ctr"/>
+          </a:p>
+        </p:txBody>
+      </p:sp>
+      <p:sp>
+        <p:nvSpPr>
+          <p:cNvPr id="8" name="TextBox 7"/>
+          <p:cNvSpPr txBox="1"/>
+          <p:nvPr/>
+        </p:nvSpPr>
+        <p:spPr>
+          <a:xfrm>
+            <a:off x="530352" y="1865376"/>
+            <a:ext cx="2414016" cy="219456"/>
+          </a:xfrm>
+          <a:prstGeom prst="rect">
+            <a:avLst/>
+          </a:prstGeom>
+          <a:noFill/>
+        </p:spPr>
+        <p:txBody>
+          <a:bodyPr wrap="square">
+            <a:spAutoFit/>
+          </a:bodyPr>
+          <a:lstStyle/>
+          <a:p>
+            <a:pPr algn="ctr"/>
+            <a:r>
+              <a:rPr sz="800" b="1" i="0">
+                <a:solidFill>
+                  <a:srgbClr val="FFFFFF"/>
+                </a:solidFill>
+              </a:rPr>
+              <a:t>Description Input</a:t>
+            </a:r>
+          </a:p>
+        </p:txBody>
+      </p:sp>
+      <p:sp>
+        <p:nvSpPr>
+          <p:cNvPr id="9" name="TextBox 8"/>
+          <p:cNvSpPr txBox="1"/>
+          <p:nvPr/>
+        </p:nvSpPr>
+        <p:spPr>
+          <a:xfrm>
+            <a:off x="3200400" y="1847088"/>
+            <a:ext cx="3200400" cy="256032"/>
+          </a:xfrm>
+          <a:prstGeom prst="rect">
+            <a:avLst/>
+          </a:prstGeom>
+          <a:noFill/>
+        </p:spPr>
+        <p:txBody>
+          <a:bodyPr wrap="square">
+            <a:spAutoFit/>
+          </a:bodyPr>
+          <a:lstStyle/>
+          <a:p>
+            <a:pPr algn="l"/>
+            <a:r>
+              <a:rPr sz="900" b="0" i="0">
+                <a:solidFill>
+                  <a:srgbClr val="1F2A37"/>
+                </a:solidFill>
+              </a:rPr>
+              <a:t>Plain-language product idea</a:t>
+            </a:r>
+          </a:p>
+        </p:txBody>
+      </p:sp>
+      <p:sp>
+        <p:nvSpPr>
+          <p:cNvPr id="10" name="Rectangle 9"/>
+          <p:cNvSpPr/>
+          <p:nvPr/>
+        </p:nvSpPr>
+        <p:spPr>
+          <a:xfrm>
+            <a:off x="457200" y="2194560"/>
+            <a:ext cx="2560320" cy="292608"/>
+          </a:xfrm>
+          <a:prstGeom prst="rect">
+            <a:avLst/>
+          </a:prstGeom>
+          <a:solidFill>
+            <a:srgbClr val="047857"/>
+          </a:solidFill>
+          <a:ln>
+            <a:noFill/>
+          </a:ln>
+        </p:spPr>
+        <p:style>
+          <a:lnRef idx="1">
+            <a:schemeClr val="accent1"/>
+          </a:lnRef>
+          <a:fillRef idx="3">
+            <a:schemeClr val="accent1"/>
+          </a:fillRef>
+          <a:effectRef idx="2">
+            <a:schemeClr val="accent1"/>
+          </a:effectRef>
+          <a:fontRef idx="minor">
+            <a:schemeClr val="lt1"/>
+          </a:fontRef>
+        </p:style>
+        <p:txBody>
+          <a:bodyPr rtlCol="0" anchor="ctr"/>
+          <a:lstStyle/>
+          <a:p>
+            <a:pPr algn="ctr"/>
+          </a:p>
+        </p:txBody>
+      </p:sp>
+      <p:sp>
+        <p:nvSpPr>
+          <p:cNvPr id="11" name="TextBox 10"/>
+          <p:cNvSpPr txBox="1"/>
+          <p:nvPr/>
+        </p:nvSpPr>
+        <p:spPr>
+          <a:xfrm>
+            <a:off x="530352" y="2231136"/>
+            <a:ext cx="2414016" cy="219456"/>
+          </a:xfrm>
+          <a:prstGeom prst="rect">
+            <a:avLst/>
+          </a:prstGeom>
+          <a:noFill/>
+        </p:spPr>
+        <p:txBody>
+          <a:bodyPr wrap="square">
+            <a:spAutoFit/>
+          </a:bodyPr>
+          <a:lstStyle/>
+          <a:p>
+            <a:pPr algn="ctr"/>
+            <a:r>
+              <a:rPr sz="800" b="1" i="0">
+                <a:solidFill>
+                  <a:srgbClr val="FFFFFF"/>
+                </a:solidFill>
+              </a:rPr>
+              <a:t>Domain Detection</a:t>
+            </a:r>
+          </a:p>
+        </p:txBody>
+      </p:sp>
+      <p:sp>
+        <p:nvSpPr>
+          <p:cNvPr id="12" name="TextBox 11"/>
+          <p:cNvSpPr txBox="1"/>
+          <p:nvPr/>
+        </p:nvSpPr>
+        <p:spPr>
+          <a:xfrm>
+            <a:off x="3200400" y="2212848"/>
+            <a:ext cx="3200400" cy="256032"/>
+          </a:xfrm>
+          <a:prstGeom prst="rect">
+            <a:avLst/>
+          </a:prstGeom>
+          <a:noFill/>
+        </p:spPr>
+        <p:txBody>
+          <a:bodyPr wrap="square">
+            <a:spAutoFit/>
+          </a:bodyPr>
+          <a:lstStyle/>
+          <a:p>
+            <a:pPr algn="l"/>
+            <a:r>
+              <a:rPr sz="900" b="0" i="0">
+                <a:solidFill>
+                  <a:srgbClr val="1F2A37"/>
+                </a:solidFill>
+              </a:rPr>
+              <a:t>13 DOMAIN_RULES — auto-selects compliance, toolchains</a:t>
+            </a:r>
+          </a:p>
+        </p:txBody>
+      </p:sp>
+      <p:sp>
+        <p:nvSpPr>
+          <p:cNvPr id="13" name="Rectangle 12"/>
+          <p:cNvSpPr/>
+          <p:nvPr/>
+        </p:nvSpPr>
+        <p:spPr>
+          <a:xfrm>
+            <a:off x="457200" y="2560320"/>
+            <a:ext cx="2560320" cy="292608"/>
+          </a:xfrm>
+          <a:prstGeom prst="rect">
+            <a:avLst/>
+          </a:prstGeom>
+          <a:solidFill>
+            <a:srgbClr val="1F2A37"/>
+          </a:solidFill>
+          <a:ln>
+            <a:noFill/>
+          </a:ln>
+        </p:spPr>
+        <p:style>
+          <a:lnRef idx="1">
+            <a:schemeClr val="accent1"/>
+          </a:lnRef>
+          <a:fillRef idx="3">
+            <a:schemeClr val="accent1"/>
+          </a:fillRef>
+          <a:effectRef idx="2">
+            <a:schemeClr val="accent1"/>
+          </a:effectRef>
+          <a:fontRef idx="minor">
+            <a:schemeClr val="lt1"/>
+          </a:fontRef>
+        </p:style>
+        <p:txBody>
+          <a:bodyPr rtlCol="0" anchor="ctr"/>
+          <a:lstStyle/>
+          <a:p>
+            <a:pPr algn="ctr"/>
+          </a:p>
+        </p:txBody>
+      </p:sp>
+      <p:sp>
+        <p:nvSpPr>
+          <p:cNvPr id="14" name="TextBox 13"/>
+          <p:cNvSpPr txBox="1"/>
+          <p:nvPr/>
+        </p:nvSpPr>
+        <p:spPr>
+          <a:xfrm>
+            <a:off x="530352" y="2596896"/>
+            <a:ext cx="2414016" cy="219456"/>
+          </a:xfrm>
+          <a:prstGeom prst="rect">
+            <a:avLst/>
+          </a:prstGeom>
+          <a:noFill/>
+        </p:spPr>
+        <p:txBody>
+          <a:bodyPr wrap="square">
+            <a:spAutoFit/>
+          </a:bodyPr>
+          <a:lstStyle/>
+          <a:p>
+            <a:pPr algn="ctr"/>
+            <a:r>
+              <a:rPr sz="800" b="1" i="0">
+                <a:solidFill>
+                  <a:srgbClr val="FFFFFF"/>
+                </a:solidFill>
+              </a:rPr>
+              <a:t>Workforce Assembly</a:t>
+            </a:r>
+          </a:p>
+        </p:txBody>
+      </p:sp>
+      <p:sp>
+        <p:nvSpPr>
+          <p:cNvPr id="15" name="TextBox 14"/>
+          <p:cNvSpPr txBox="1"/>
+          <p:nvPr/>
+        </p:nvSpPr>
+        <p:spPr>
+          <a:xfrm>
+            <a:off x="3200400" y="2578608"/>
+            <a:ext cx="3200400" cy="256032"/>
+          </a:xfrm>
+          <a:prstGeom prst="rect">
+            <a:avLst/>
+          </a:prstGeom>
+          <a:noFill/>
+        </p:spPr>
+        <p:txBody>
+          <a:bodyPr wrap="square">
+            <a:spAutoFit/>
+          </a:bodyPr>
+          <a:lstStyle/>
+          <a:p>
+            <a:pPr algn="l"/>
+            <a:r>
+              <a:rPr sz="900" b="0" i="0">
+                <a:solidFill>
+                  <a:srgbClr val="1F2A37"/>
+                </a:solidFill>
+              </a:rPr>
+              <a:t>19 agents, 5 teams from WORKFORCE_REGISTRY</a:t>
+            </a:r>
+          </a:p>
+        </p:txBody>
+      </p:sp>
+      <p:sp>
+        <p:nvSpPr>
+          <p:cNvPr id="16" name="Rectangle 15"/>
+          <p:cNvSpPr/>
+          <p:nvPr/>
+        </p:nvSpPr>
+        <p:spPr>
+          <a:xfrm>
+            <a:off x="457200" y="2926080"/>
+            <a:ext cx="2560320" cy="292608"/>
+          </a:xfrm>
+          <a:prstGeom prst="rect">
+            <a:avLst/>
+          </a:prstGeom>
+          <a:solidFill>
+            <a:srgbClr val="047857"/>
+          </a:solidFill>
+          <a:ln>
+            <a:noFill/>
+          </a:ln>
+        </p:spPr>
+        <p:style>
+          <a:lnRef idx="1">
+            <a:schemeClr val="accent1"/>
+          </a:lnRef>
+          <a:fillRef idx="3">
+            <a:schemeClr val="accent1"/>
+          </a:fillRef>
+          <a:effectRef idx="2">
+            <a:schemeClr val="accent1"/>
+          </a:effectRef>
+          <a:fontRef idx="minor">
+            <a:schemeClr val="lt1"/>
+          </a:fontRef>
+        </p:style>
+        <p:txBody>
+          <a:bodyPr rtlCol="0" anchor="ctr"/>
+          <a:lstStyle/>
+          <a:p>
+            <a:pPr algn="ctr"/>
+          </a:p>
+        </p:txBody>
+      </p:sp>
+      <p:sp>
+        <p:nvSpPr>
+          <p:cNvPr id="17" name="TextBox 16"/>
+          <p:cNvSpPr txBox="1"/>
+          <p:nvPr/>
+        </p:nvSpPr>
+        <p:spPr>
+          <a:xfrm>
+            <a:off x="530352" y="2962656"/>
+            <a:ext cx="2414016" cy="219456"/>
+          </a:xfrm>
+          <a:prstGeom prst="rect">
+            <a:avLst/>
+          </a:prstGeom>
+          <a:noFill/>
+        </p:spPr>
+        <p:txBody>
+          <a:bodyPr wrap="square">
+            <a:spAutoFit/>
+          </a:bodyPr>
+          <a:lstStyle/>
+          <a:p>
+            <a:pPr algn="ctr"/>
+            <a:r>
+              <a:rPr sz="800" b="1" i="0">
+                <a:solidFill>
+                  <a:srgbClr val="FFFFFF"/>
+                </a:solidFill>
+              </a:rPr>
+              <a:t>Hierarchical Decomposition</a:t>
+            </a:r>
+          </a:p>
+        </p:txBody>
+      </p:sp>
+      <p:sp>
+        <p:nvSpPr>
+          <p:cNvPr id="18" name="TextBox 17"/>
+          <p:cNvSpPr txBox="1"/>
+          <p:nvPr/>
+        </p:nvSpPr>
+        <p:spPr>
+          <a:xfrm>
+            <a:off x="3200400" y="2944368"/>
+            <a:ext cx="3200400" cy="256032"/>
+          </a:xfrm>
+          <a:prstGeom prst="rect">
+            <a:avLst/>
+          </a:prstGeom>
+          <a:noFill/>
+        </p:spPr>
+        <p:txBody>
+          <a:bodyPr wrap="square">
+            <a:spAutoFit/>
+          </a:bodyPr>
+          <a:lstStyle/>
+          <a:p>
+            <a:pPr algn="l"/>
+            <a:r>
+              <a:rPr sz="900" b="0" i="0">
+                <a:solidFill>
+                  <a:srgbClr val="1F2A37"/>
+                </a:solidFill>
+              </a:rPr>
+              <a:t>LLM → 32 task types → dependency graph</a:t>
+            </a:r>
+          </a:p>
+        </p:txBody>
+      </p:sp>
+      <p:sp>
+        <p:nvSpPr>
+          <p:cNvPr id="19" name="Rectangle 18"/>
+          <p:cNvSpPr/>
+          <p:nvPr/>
+        </p:nvSpPr>
+        <p:spPr>
+          <a:xfrm>
+            <a:off x="457200" y="3291840"/>
+            <a:ext cx="2560320" cy="292608"/>
+          </a:xfrm>
+          <a:prstGeom prst="rect">
+            <a:avLst/>
+          </a:prstGeom>
+          <a:solidFill>
+            <a:srgbClr val="F59E0B"/>
+          </a:solidFill>
+          <a:ln>
+            <a:noFill/>
+          </a:ln>
+        </p:spPr>
+        <p:style>
+          <a:lnRef idx="1">
+            <a:schemeClr val="accent1"/>
+          </a:lnRef>
+          <a:fillRef idx="3">
+            <a:schemeClr val="accent1"/>
+          </a:fillRef>
+          <a:effectRef idx="2">
+            <a:schemeClr val="accent1"/>
+          </a:effectRef>
+          <a:fontRef idx="minor">
+            <a:schemeClr val="lt1"/>
+          </a:fontRef>
+        </p:style>
+        <p:txBody>
+          <a:bodyPr rtlCol="0" anchor="ctr"/>
+          <a:lstStyle/>
+          <a:p>
+            <a:pPr algn="ctr"/>
+          </a:p>
+        </p:txBody>
+      </p:sp>
+      <p:sp>
+        <p:nvSpPr>
+          <p:cNvPr id="20" name="TextBox 19"/>
+          <p:cNvSpPr txBox="1"/>
+          <p:nvPr/>
+        </p:nvSpPr>
+        <p:spPr>
+          <a:xfrm>
+            <a:off x="530352" y="3328416"/>
+            <a:ext cx="2414016" cy="219456"/>
+          </a:xfrm>
+          <a:prstGeom prst="rect">
+            <a:avLst/>
+          </a:prstGeom>
+          <a:noFill/>
+        </p:spPr>
+        <p:txBody>
+          <a:bodyPr wrap="square">
+            <a:spAutoFit/>
+          </a:bodyPr>
+          <a:lstStyle/>
+          <a:p>
+            <a:pPr algn="ctr"/>
+            <a:r>
+              <a:rPr sz="800" b="1" i="0">
+                <a:solidFill>
+                  <a:srgbClr val="FFFFFF"/>
+                </a:solidFill>
+              </a:rPr>
+              <a:t>Critic Reviews Plan</a:t>
+            </a:r>
+          </a:p>
+        </p:txBody>
+      </p:sp>
+      <p:sp>
+        <p:nvSpPr>
+          <p:cNvPr id="21" name="TextBox 20"/>
+          <p:cNvSpPr txBox="1"/>
+          <p:nvPr/>
+        </p:nvSpPr>
+        <p:spPr>
+          <a:xfrm>
+            <a:off x="3200400" y="3310128"/>
+            <a:ext cx="3200400" cy="256032"/>
+          </a:xfrm>
+          <a:prstGeom prst="rect">
+            <a:avLst/>
+          </a:prstGeom>
+          <a:noFill/>
+        </p:spPr>
+        <p:txBody>
+          <a:bodyPr wrap="square">
+            <a:spAutoFit/>
+          </a:bodyPr>
+          <a:lstStyle/>
+          <a:p>
+            <a:pPr algn="l"/>
+            <a:r>
+              <a:rPr sz="900" b="0" i="0">
+                <a:solidFill>
+                  <a:srgbClr val="1F2A37"/>
+                </a:solidFill>
+              </a:rPr>
+              <a:t>CriticAgent scores 0-100, flaws, suggestions</a:t>
+            </a:r>
+          </a:p>
+        </p:txBody>
+      </p:sp>
+      <p:sp>
+        <p:nvSpPr>
+          <p:cNvPr id="22" name="Rectangle 21"/>
+          <p:cNvSpPr/>
+          <p:nvPr/>
+        </p:nvSpPr>
+        <p:spPr>
+          <a:xfrm>
+            <a:off x="457200" y="3657600"/>
+            <a:ext cx="2560320" cy="292608"/>
+          </a:xfrm>
+          <a:prstGeom prst="rect">
+            <a:avLst/>
+          </a:prstGeom>
+          <a:solidFill>
+            <a:srgbClr val="EF4444"/>
+          </a:solidFill>
+          <a:ln>
+            <a:noFill/>
+          </a:ln>
+        </p:spPr>
+        <p:style>
+          <a:lnRef idx="1">
+            <a:schemeClr val="accent1"/>
+          </a:lnRef>
+          <a:fillRef idx="3">
+            <a:schemeClr val="accent1"/>
+          </a:fillRef>
+          <a:effectRef idx="2">
+            <a:schemeClr val="accent1"/>
+          </a:effectRef>
+          <a:fontRef idx="minor">
+            <a:schemeClr val="lt1"/>
+          </a:fontRef>
+        </p:style>
+        <p:txBody>
+          <a:bodyPr rtlCol="0" anchor="ctr"/>
+          <a:lstStyle/>
+          <a:p>
+            <a:pPr algn="ctr"/>
+          </a:p>
+        </p:txBody>
+      </p:sp>
+      <p:sp>
+        <p:nvSpPr>
+          <p:cNvPr id="23" name="TextBox 22"/>
+          <p:cNvSpPr txBox="1"/>
+          <p:nvPr/>
+        </p:nvSpPr>
+        <p:spPr>
+          <a:xfrm>
+            <a:off x="530352" y="3694176"/>
+            <a:ext cx="2414016" cy="219456"/>
+          </a:xfrm>
+          <a:prstGeom prst="rect">
+            <a:avLst/>
+          </a:prstGeom>
+          <a:noFill/>
+        </p:spPr>
+        <p:txBody>
+          <a:bodyPr wrap="square">
+            <a:spAutoFit/>
+          </a:bodyPr>
+          <a:lstStyle/>
+          <a:p>
+            <a:pPr algn="ctr"/>
+            <a:r>
+              <a:rPr sz="800" b="1" i="0">
+                <a:solidFill>
+                  <a:srgbClr val="FFFFFF"/>
+                </a:solidFill>
+              </a:rPr>
+              <a:t>HITL Plan Approval</a:t>
+            </a:r>
+          </a:p>
+        </p:txBody>
+      </p:sp>
+      <p:sp>
+        <p:nvSpPr>
+          <p:cNvPr id="24" name="TextBox 23"/>
+          <p:cNvSpPr txBox="1"/>
+          <p:nvPr/>
+        </p:nvSpPr>
+        <p:spPr>
+          <a:xfrm>
+            <a:off x="3200400" y="3675888"/>
+            <a:ext cx="3200400" cy="256032"/>
+          </a:xfrm>
+          <a:prstGeom prst="rect">
+            <a:avLst/>
+          </a:prstGeom>
+          <a:noFill/>
+        </p:spPr>
+        <p:txBody>
+          <a:bodyPr wrap="square">
+            <a:spAutoFit/>
+          </a:bodyPr>
+          <a:lstStyle/>
+          <a:p>
+            <a:pPr algn="l"/>
+            <a:r>
+              <a:rPr sz="900" b="0" i="0">
+                <a:solidFill>
+                  <a:srgbClr val="1F2A37"/>
+                </a:solidFill>
+              </a:rPr>
+              <a:t>Human reviews decomposed plan</a:t>
+            </a:r>
+          </a:p>
+        </p:txBody>
+      </p:sp>
+      <p:sp>
+        <p:nvSpPr>
+          <p:cNvPr id="25" name="Rectangle 24"/>
+          <p:cNvSpPr/>
+          <p:nvPr/>
+        </p:nvSpPr>
+        <p:spPr>
+          <a:xfrm>
+            <a:off x="457200" y="4023360"/>
+            <a:ext cx="2560320" cy="292608"/>
+          </a:xfrm>
+          <a:prstGeom prst="rect">
+            <a:avLst/>
+          </a:prstGeom>
+          <a:solidFill>
+            <a:srgbClr val="10B981"/>
+          </a:solidFill>
+          <a:ln>
+            <a:noFill/>
+          </a:ln>
+        </p:spPr>
+        <p:style>
+          <a:lnRef idx="1">
+            <a:schemeClr val="accent1"/>
+          </a:lnRef>
+          <a:fillRef idx="3">
+            <a:schemeClr val="accent1"/>
+          </a:fillRef>
+          <a:effectRef idx="2">
+            <a:schemeClr val="accent1"/>
+          </a:effectRef>
+          <a:fontRef idx="minor">
+            <a:schemeClr val="lt1"/>
+          </a:fontRef>
+        </p:style>
+        <p:txBody>
+          <a:bodyPr rtlCol="0" anchor="ctr"/>
+          <a:lstStyle/>
+          <a:p>
+            <a:pPr algn="ctr"/>
+          </a:p>
+        </p:txBody>
+      </p:sp>
+      <p:sp>
+        <p:nvSpPr>
+          <p:cNvPr id="26" name="TextBox 25"/>
+          <p:cNvSpPr txBox="1"/>
+          <p:nvPr/>
+        </p:nvSpPr>
+        <p:spPr>
+          <a:xfrm>
+            <a:off x="530352" y="4059936"/>
+            <a:ext cx="2414016" cy="219456"/>
+          </a:xfrm>
+          <a:prstGeom prst="rect">
+            <a:avLst/>
+          </a:prstGeom>
+          <a:noFill/>
+        </p:spPr>
+        <p:txBody>
+          <a:bodyPr wrap="square">
+            <a:spAutoFit/>
+          </a:bodyPr>
+          <a:lstStyle/>
+          <a:p>
+            <a:pPr algn="ctr"/>
+            <a:r>
+              <a:rPr sz="800" b="1" i="0">
+                <a:solidFill>
+                  <a:srgbClr val="FFFFFF"/>
+                </a:solidFill>
+              </a:rPr>
+              <a:t>Wave Execution</a:t>
+            </a:r>
+          </a:p>
+        </p:txBody>
+      </p:sp>
+      <p:sp>
+        <p:nvSpPr>
+          <p:cNvPr id="27" name="TextBox 26"/>
+          <p:cNvSpPr txBox="1"/>
+          <p:nvPr/>
+        </p:nvSpPr>
+        <p:spPr>
+          <a:xfrm>
+            <a:off x="3200400" y="4041648"/>
+            <a:ext cx="3200400" cy="256032"/>
+          </a:xfrm>
+          <a:prstGeom prst="rect">
+            <a:avLst/>
+          </a:prstGeom>
+          <a:noFill/>
+        </p:spPr>
+        <p:txBody>
+          <a:bodyPr wrap="square">
+            <a:spAutoFit/>
+          </a:bodyPr>
+          <a:lstStyle/>
+          <a:p>
+            <a:pPr algn="l"/>
+            <a:r>
+              <a:rPr sz="900" b="0" i="0">
+                <a:solidFill>
+                  <a:srgbClr val="1F2A37"/>
+                </a:solidFill>
+              </a:rPr>
+              <a:t>Independent tasks in parallel, deps sequential</a:t>
+            </a:r>
+          </a:p>
+        </p:txBody>
+      </p:sp>
+      <p:sp>
+        <p:nvSpPr>
+          <p:cNvPr id="28" name="Rectangle 27"/>
+          <p:cNvSpPr/>
+          <p:nvPr/>
+        </p:nvSpPr>
+        <p:spPr>
+          <a:xfrm>
+            <a:off x="457200" y="4389120"/>
+            <a:ext cx="2560320" cy="292608"/>
+          </a:xfrm>
+          <a:prstGeom prst="rect">
+            <a:avLst/>
+          </a:prstGeom>
+          <a:solidFill>
+            <a:srgbClr val="F59E0B"/>
+          </a:solidFill>
+          <a:ln>
+            <a:noFill/>
+          </a:ln>
+        </p:spPr>
+        <p:style>
+          <a:lnRef idx="1">
+            <a:schemeClr val="accent1"/>
+          </a:lnRef>
+          <a:fillRef idx="3">
+            <a:schemeClr val="accent1"/>
+          </a:fillRef>
+          <a:effectRef idx="2">
+            <a:schemeClr val="accent1"/>
+          </a:effectRef>
+          <a:fontRef idx="minor">
+            <a:schemeClr val="lt1"/>
+          </a:fontRef>
+        </p:style>
+        <p:txBody>
+          <a:bodyPr rtlCol="0" anchor="ctr"/>
+          <a:lstStyle/>
+          <a:p>
+            <a:pPr algn="ctr"/>
+          </a:p>
+        </p:txBody>
+      </p:sp>
+      <p:sp>
+        <p:nvSpPr>
+          <p:cNvPr id="29" name="TextBox 28"/>
+          <p:cNvSpPr txBox="1"/>
+          <p:nvPr/>
+        </p:nvSpPr>
+        <p:spPr>
+          <a:xfrm>
+            <a:off x="530352" y="4425696"/>
+            <a:ext cx="2414016" cy="219456"/>
+          </a:xfrm>
+          <a:prstGeom prst="rect">
+            <a:avLst/>
+          </a:prstGeom>
+          <a:noFill/>
+        </p:spPr>
+        <p:txBody>
+          <a:bodyPr wrap="square">
+            <a:spAutoFit/>
+          </a:bodyPr>
+          <a:lstStyle/>
+          <a:p>
+            <a:pPr algn="ctr"/>
+            <a:r>
+              <a:rPr sz="800" b="1" i="0">
+                <a:solidFill>
+                  <a:srgbClr val="FFFFFF"/>
+                </a:solidFill>
+              </a:rPr>
+              <a:t>Critic Reviews Code</a:t>
+            </a:r>
+          </a:p>
+        </p:txBody>
+      </p:sp>
+      <p:sp>
+        <p:nvSpPr>
+          <p:cNvPr id="30" name="TextBox 29"/>
+          <p:cNvSpPr txBox="1"/>
+          <p:nvPr/>
+        </p:nvSpPr>
+        <p:spPr>
+          <a:xfrm>
+            <a:off x="3200400" y="4407408"/>
+            <a:ext cx="3200400" cy="256032"/>
+          </a:xfrm>
+          <a:prstGeom prst="rect">
+            <a:avLst/>
+          </a:prstGeom>
+          <a:noFill/>
+        </p:spPr>
+        <p:txBody>
+          <a:bodyPr wrap="square">
+            <a:spAutoFit/>
+          </a:bodyPr>
+          <a:lstStyle/>
+          <a:p>
+            <a:pPr algn="l"/>
+            <a:r>
+              <a:rPr sz="900" b="0" i="0">
+                <a:solidFill>
+                  <a:srgbClr val="1F2A37"/>
+                </a:solidFill>
+              </a:rPr>
+              <a:t>Per-task quality review</a:t>
+            </a:r>
+          </a:p>
+        </p:txBody>
+      </p:sp>
+      <p:sp>
+        <p:nvSpPr>
+          <p:cNvPr id="31" name="Rectangle 30"/>
+          <p:cNvSpPr/>
+          <p:nvPr/>
+        </p:nvSpPr>
+        <p:spPr>
+          <a:xfrm>
+            <a:off x="457200" y="4754880"/>
+            <a:ext cx="2560320" cy="292608"/>
+          </a:xfrm>
+          <a:prstGeom prst="rect">
+            <a:avLst/>
+          </a:prstGeom>
+          <a:solidFill>
+            <a:srgbClr val="1F2A37"/>
+          </a:solidFill>
+          <a:ln>
+            <a:noFill/>
+          </a:ln>
+        </p:spPr>
+        <p:style>
+          <a:lnRef idx="1">
+            <a:schemeClr val="accent1"/>
+          </a:lnRef>
+          <a:fillRef idx="3">
+            <a:schemeClr val="accent1"/>
+          </a:fillRef>
+          <a:effectRef idx="2">
+            <a:schemeClr val="accent1"/>
+          </a:effectRef>
+          <a:fontRef idx="minor">
+            <a:schemeClr val="lt1"/>
+          </a:fontRef>
+        </p:style>
+        <p:txBody>
+          <a:bodyPr rtlCol="0" anchor="ctr"/>
+          <a:lstStyle/>
+          <a:p>
+            <a:pPr algn="ctr"/>
+          </a:p>
+        </p:txBody>
+      </p:sp>
+      <p:sp>
+        <p:nvSpPr>
+          <p:cNvPr id="32" name="TextBox 31"/>
+          <p:cNvSpPr txBox="1"/>
+          <p:nvPr/>
+        </p:nvSpPr>
+        <p:spPr>
+          <a:xfrm>
+            <a:off x="530352" y="4791456"/>
+            <a:ext cx="2414016" cy="219456"/>
+          </a:xfrm>
+          <a:prstGeom prst="rect">
+            <a:avLst/>
+          </a:prstGeom>
+          <a:noFill/>
+        </p:spPr>
+        <p:txBody>
+          <a:bodyPr wrap="square">
+            <a:spAutoFit/>
+          </a:bodyPr>
+          <a:lstStyle/>
+          <a:p>
+            <a:pPr algn="ctr"/>
+            <a:r>
+              <a:rPr sz="800" b="1" i="0">
+                <a:solidFill>
+                  <a:srgbClr val="FFFFFF"/>
+                </a:solidFill>
+              </a:rPr>
+              <a:t>Integration Merge</a:t>
+            </a:r>
+          </a:p>
+        </p:txBody>
+      </p:sp>
+      <p:sp>
+        <p:nvSpPr>
+          <p:cNvPr id="33" name="TextBox 32"/>
+          <p:cNvSpPr txBox="1"/>
+          <p:nvPr/>
+        </p:nvSpPr>
+        <p:spPr>
+          <a:xfrm>
+            <a:off x="3200400" y="4773168"/>
+            <a:ext cx="3200400" cy="256032"/>
+          </a:xfrm>
+          <a:prstGeom prst="rect">
+            <a:avLst/>
+          </a:prstGeom>
+          <a:noFill/>
+        </p:spPr>
+        <p:txBody>
+          <a:bodyPr wrap="square">
+            <a:spAutoFit/>
+          </a:bodyPr>
+          <a:lstStyle/>
+          <a:p>
+            <a:pPr algn="l"/>
+            <a:r>
+              <a:rPr sz="900" b="0" i="0">
+                <a:solidFill>
+                  <a:srgbClr val="1F2A37"/>
+                </a:solidFill>
+              </a:rPr>
+              <a:t>All outputs combined</a:t>
+            </a:r>
+          </a:p>
+        </p:txBody>
+      </p:sp>
+      <p:sp>
+        <p:nvSpPr>
+          <p:cNvPr id="34" name="Rectangle 33"/>
+          <p:cNvSpPr/>
+          <p:nvPr/>
+        </p:nvSpPr>
+        <p:spPr>
+          <a:xfrm>
+            <a:off x="457200" y="5120640"/>
+            <a:ext cx="2560320" cy="292608"/>
+          </a:xfrm>
+          <a:prstGeom prst="rect">
+            <a:avLst/>
+          </a:prstGeom>
+          <a:solidFill>
+            <a:srgbClr val="F59E0B"/>
+          </a:solidFill>
+          <a:ln>
+            <a:noFill/>
+          </a:ln>
+        </p:spPr>
+        <p:style>
+          <a:lnRef idx="1">
+            <a:schemeClr val="accent1"/>
+          </a:lnRef>
+          <a:fillRef idx="3">
+            <a:schemeClr val="accent1"/>
+          </a:fillRef>
+          <a:effectRef idx="2">
+            <a:schemeClr val="accent1"/>
+          </a:effectRef>
+          <a:fontRef idx="minor">
+            <a:schemeClr val="lt1"/>
+          </a:fontRef>
+        </p:style>
+        <p:txBody>
+          <a:bodyPr rtlCol="0" anchor="ctr"/>
+          <a:lstStyle/>
+          <a:p>
+            <a:pPr algn="ctr"/>
+          </a:p>
+        </p:txBody>
+      </p:sp>
+      <p:sp>
+        <p:nvSpPr>
+          <p:cNvPr id="35" name="TextBox 34"/>
+          <p:cNvSpPr txBox="1"/>
+          <p:nvPr/>
+        </p:nvSpPr>
+        <p:spPr>
+          <a:xfrm>
+            <a:off x="530352" y="5157216"/>
+            <a:ext cx="2414016" cy="219456"/>
+          </a:xfrm>
+          <a:prstGeom prst="rect">
+            <a:avLst/>
+          </a:prstGeom>
+          <a:noFill/>
+        </p:spPr>
+        <p:txBody>
+          <a:bodyPr wrap="square">
+            <a:spAutoFit/>
+          </a:bodyPr>
+          <a:lstStyle/>
+          <a:p>
+            <a:pPr algn="ctr"/>
+            <a:r>
+              <a:rPr sz="800" b="1" i="0">
+                <a:solidFill>
+                  <a:srgbClr val="FFFFFF"/>
+                </a:solidFill>
+              </a:rPr>
+              <a:t>Critic Reviews Integration</a:t>
+            </a:r>
+          </a:p>
+        </p:txBody>
+      </p:sp>
+      <p:sp>
+        <p:nvSpPr>
+          <p:cNvPr id="36" name="TextBox 35"/>
+          <p:cNvSpPr txBox="1"/>
+          <p:nvPr/>
+        </p:nvSpPr>
+        <p:spPr>
+          <a:xfrm>
+            <a:off x="3200400" y="5138928"/>
+            <a:ext cx="3200400" cy="256032"/>
+          </a:xfrm>
+          <a:prstGeom prst="rect">
+            <a:avLst/>
+          </a:prstGeom>
+          <a:noFill/>
+        </p:spPr>
+        <p:txBody>
+          <a:bodyPr wrap="square">
+            <a:spAutoFit/>
+          </a:bodyPr>
+          <a:lstStyle/>
+          <a:p>
+            <a:pPr algn="l"/>
+            <a:r>
+              <a:rPr sz="900" b="0" i="0">
+                <a:solidFill>
+                  <a:srgbClr val="1F2A37"/>
+                </a:solidFill>
+              </a:rPr>
+              <a:t>System-level review</a:t>
+            </a:r>
+          </a:p>
+        </p:txBody>
+      </p:sp>
+      <p:sp>
+        <p:nvSpPr>
+          <p:cNvPr id="37" name="Rectangle 36"/>
+          <p:cNvSpPr/>
+          <p:nvPr/>
+        </p:nvSpPr>
+        <p:spPr>
+          <a:xfrm>
+            <a:off x="457200" y="5486400"/>
+            <a:ext cx="2560320" cy="292608"/>
+          </a:xfrm>
+          <a:prstGeom prst="rect">
+            <a:avLst/>
+          </a:prstGeom>
+          <a:solidFill>
+            <a:srgbClr val="EF4444"/>
+          </a:solidFill>
+          <a:ln>
+            <a:noFill/>
+          </a:ln>
+        </p:spPr>
+        <p:style>
+          <a:lnRef idx="1">
+            <a:schemeClr val="accent1"/>
+          </a:lnRef>
+          <a:fillRef idx="3">
+            <a:schemeClr val="accent1"/>
+          </a:fillRef>
+          <a:effectRef idx="2">
+            <a:schemeClr val="accent1"/>
+          </a:effectRef>
+          <a:fontRef idx="minor">
+            <a:schemeClr val="lt1"/>
+          </a:fontRef>
+        </p:style>
+        <p:txBody>
+          <a:bodyPr rtlCol="0" anchor="ctr"/>
+          <a:lstStyle/>
+          <a:p>
+            <a:pPr algn="ctr"/>
+          </a:p>
+        </p:txBody>
+      </p:sp>
+      <p:sp>
+        <p:nvSpPr>
+          <p:cNvPr id="38" name="TextBox 37"/>
+          <p:cNvSpPr txBox="1"/>
+          <p:nvPr/>
+        </p:nvSpPr>
+        <p:spPr>
+          <a:xfrm>
+            <a:off x="530352" y="5522976"/>
+            <a:ext cx="2414016" cy="219456"/>
+          </a:xfrm>
+          <a:prstGeom prst="rect">
+            <a:avLst/>
+          </a:prstGeom>
+          <a:noFill/>
+        </p:spPr>
+        <p:txBody>
+          <a:bodyPr wrap="square">
+            <a:spAutoFit/>
+          </a:bodyPr>
+          <a:lstStyle/>
+          <a:p>
+            <a:pPr algn="ctr"/>
+            <a:r>
+              <a:rPr sz="800" b="1" i="0">
+                <a:solidFill>
+                  <a:srgbClr val="FFFFFF"/>
+                </a:solidFill>
+              </a:rPr>
+              <a:t>HITL Final Approval</a:t>
+            </a:r>
+          </a:p>
+        </p:txBody>
+      </p:sp>
+      <p:sp>
+        <p:nvSpPr>
+          <p:cNvPr id="39" name="TextBox 38"/>
+          <p:cNvSpPr txBox="1"/>
+          <p:nvPr/>
+        </p:nvSpPr>
+        <p:spPr>
+          <a:xfrm>
+            <a:off x="3200400" y="5504688"/>
+            <a:ext cx="3200400" cy="256032"/>
+          </a:xfrm>
+          <a:prstGeom prst="rect">
+            <a:avLst/>
+          </a:prstGeom>
+          <a:noFill/>
+        </p:spPr>
+        <p:txBody>
+          <a:bodyPr wrap="square">
+            <a:spAutoFit/>
+          </a:bodyPr>
+          <a:lstStyle/>
+          <a:p>
+            <a:pPr algn="l"/>
+            <a:r>
+              <a:rPr sz="900" b="0" i="0">
+                <a:solidFill>
+                  <a:srgbClr val="1F2A37"/>
+                </a:solidFill>
+              </a:rPr>
+              <a:t>Human signs off on completed build</a:t>
+            </a:r>
+          </a:p>
+        </p:txBody>
+      </p:sp>
+      <p:sp>
+        <p:nvSpPr>
+          <p:cNvPr id="40" name="Rectangle 39"/>
+          <p:cNvSpPr/>
+          <p:nvPr/>
+        </p:nvSpPr>
+        <p:spPr>
+          <a:xfrm>
+            <a:off x="6583680" y="1508760"/>
+            <a:ext cx="1828800" cy="256032"/>
+          </a:xfrm>
+          <a:prstGeom prst="rect">
+            <a:avLst/>
+          </a:prstGeom>
+          <a:solidFill>
+            <a:srgbClr val="10B981"/>
+          </a:solidFill>
+          <a:ln>
+            <a:noFill/>
+          </a:ln>
+        </p:spPr>
+        <p:style>
+          <a:lnRef idx="1">
+            <a:schemeClr val="accent1"/>
+          </a:lnRef>
+          <a:fillRef idx="3">
+            <a:schemeClr val="accent1"/>
+          </a:fillRef>
+          <a:effectRef idx="2">
+            <a:schemeClr val="accent1"/>
+          </a:effectRef>
+          <a:fontRef idx="minor">
+            <a:schemeClr val="lt1"/>
+          </a:fontRef>
+        </p:style>
+        <p:txBody>
+          <a:bodyPr rtlCol="0" anchor="ctr"/>
+          <a:lstStyle/>
+          <a:p>
+            <a:pPr algn="ctr"/>
+          </a:p>
+        </p:txBody>
+      </p:sp>
+      <p:sp>
+        <p:nvSpPr>
+          <p:cNvPr id="41" name="TextBox 40"/>
+          <p:cNvSpPr txBox="1"/>
+          <p:nvPr/>
+        </p:nvSpPr>
+        <p:spPr>
+          <a:xfrm>
+            <a:off x="6638544" y="1527048"/>
+            <a:ext cx="1719072" cy="219456"/>
+          </a:xfrm>
+          <a:prstGeom prst="rect">
+            <a:avLst/>
+          </a:prstGeom>
+          <a:noFill/>
+        </p:spPr>
+        <p:txBody>
+          <a:bodyPr wrap="square">
+            <a:spAutoFit/>
+          </a:bodyPr>
+          <a:lstStyle/>
+          <a:p>
+            <a:pPr algn="ctr"/>
+            <a:r>
+              <a:rPr sz="1000" b="1" i="0">
+                <a:solidFill>
+                  <a:srgbClr val="FFFFFF"/>
+                </a:solidFill>
+              </a:rPr>
+              <a:t>Patterns in 0→1</a:t>
+            </a:r>
+          </a:p>
+        </p:txBody>
+      </p:sp>
+      <p:sp>
+        <p:nvSpPr>
+          <p:cNvPr id="42" name="TextBox 41"/>
+          <p:cNvSpPr txBox="1"/>
+          <p:nvPr/>
+        </p:nvSpPr>
+        <p:spPr>
+          <a:xfrm>
+            <a:off x="6675120" y="1828800"/>
+            <a:ext cx="1828800" cy="219456"/>
+          </a:xfrm>
+          <a:prstGeom prst="rect">
+            <a:avLst/>
+          </a:prstGeom>
+          <a:noFill/>
+        </p:spPr>
+        <p:txBody>
+          <a:bodyPr wrap="square">
+            <a:spAutoFit/>
+          </a:bodyPr>
+          <a:lstStyle/>
+          <a:p>
+            <a:pPr algn="l"/>
+            <a:r>
+              <a:rPr sz="900" b="1" i="0">
+                <a:solidFill>
+                  <a:srgbClr val="047857"/>
+                </a:solidFill>
+              </a:rPr>
+              <a:t>ReAct</a:t>
+            </a:r>
+          </a:p>
+        </p:txBody>
+      </p:sp>
+      <p:sp>
+        <p:nvSpPr>
+          <p:cNvPr id="43" name="TextBox 42"/>
+          <p:cNvSpPr txBox="1"/>
+          <p:nvPr/>
+        </p:nvSpPr>
+        <p:spPr>
+          <a:xfrm>
+            <a:off x="8595360" y="1828800"/>
+            <a:ext cx="3200400" cy="219456"/>
+          </a:xfrm>
+          <a:prstGeom prst="rect">
+            <a:avLst/>
+          </a:prstGeom>
+          <a:noFill/>
+        </p:spPr>
+        <p:txBody>
+          <a:bodyPr wrap="square">
+            <a:spAutoFit/>
+          </a:bodyPr>
+          <a:lstStyle/>
+          <a:p>
+            <a:pPr algn="l"/>
+            <a:r>
+              <a:rPr sz="900" b="0" i="0">
+                <a:solidFill>
+                  <a:srgbClr val="1F2A37"/>
+                </a:solidFill>
+              </a:rPr>
+              <a:t>Per-task: observe → think → act → observe</a:t>
+            </a:r>
+          </a:p>
+        </p:txBody>
+      </p:sp>
+      <p:sp>
+        <p:nvSpPr>
+          <p:cNvPr id="44" name="TextBox 43"/>
+          <p:cNvSpPr txBox="1"/>
+          <p:nvPr/>
+        </p:nvSpPr>
+        <p:spPr>
+          <a:xfrm>
+            <a:off x="6675120" y="2103120"/>
+            <a:ext cx="1828800" cy="219456"/>
+          </a:xfrm>
+          <a:prstGeom prst="rect">
+            <a:avLst/>
+          </a:prstGeom>
+          <a:noFill/>
+        </p:spPr>
+        <p:txBody>
+          <a:bodyPr wrap="square">
+            <a:spAutoFit/>
+          </a:bodyPr>
+          <a:lstStyle/>
+          <a:p>
+            <a:pPr algn="l"/>
+            <a:r>
+              <a:rPr sz="900" b="1" i="0">
+                <a:solidFill>
+                  <a:srgbClr val="047857"/>
+                </a:solidFill>
+              </a:rPr>
+              <a:t>Hierarchical Decomp</a:t>
+            </a:r>
+          </a:p>
+        </p:txBody>
+      </p:sp>
+      <p:sp>
+        <p:nvSpPr>
+          <p:cNvPr id="45" name="TextBox 44"/>
+          <p:cNvSpPr txBox="1"/>
+          <p:nvPr/>
+        </p:nvSpPr>
+        <p:spPr>
+          <a:xfrm>
+            <a:off x="8595360" y="2103120"/>
+            <a:ext cx="3200400" cy="219456"/>
+          </a:xfrm>
+          <a:prstGeom prst="rect">
+            <a:avLst/>
+          </a:prstGeom>
+          <a:noFill/>
+        </p:spPr>
+        <p:txBody>
+          <a:bodyPr wrap="square">
+            <a:spAutoFit/>
+          </a:bodyPr>
+          <a:lstStyle/>
+          <a:p>
+            <a:pPr algn="l"/>
+            <a:r>
+              <a:rPr sz="900" b="0" i="0">
+                <a:solidFill>
+                  <a:srgbClr val="1F2A37"/>
+                </a:solidFill>
+              </a:rPr>
+              <a:t>Description → task graph (32 types)</a:t>
+            </a:r>
+          </a:p>
+        </p:txBody>
+      </p:sp>
+      <p:sp>
+        <p:nvSpPr>
+          <p:cNvPr id="46" name="TextBox 45"/>
+          <p:cNvSpPr txBox="1"/>
+          <p:nvPr/>
+        </p:nvSpPr>
+        <p:spPr>
+          <a:xfrm>
+            <a:off x="6675120" y="2377440"/>
+            <a:ext cx="1828800" cy="219456"/>
+          </a:xfrm>
+          <a:prstGeom prst="rect">
+            <a:avLst/>
+          </a:prstGeom>
+          <a:noFill/>
+        </p:spPr>
+        <p:txBody>
+          <a:bodyPr wrap="square">
+            <a:spAutoFit/>
+          </a:bodyPr>
+          <a:lstStyle/>
+          <a:p>
+            <a:pPr algn="l"/>
+            <a:r>
+              <a:rPr sz="900" b="1" i="0">
+                <a:solidFill>
+                  <a:srgbClr val="047857"/>
+                </a:solidFill>
+              </a:rPr>
+              <a:t>Wave Parallel</a:t>
+            </a:r>
+          </a:p>
+        </p:txBody>
+      </p:sp>
+      <p:sp>
+        <p:nvSpPr>
+          <p:cNvPr id="47" name="TextBox 46"/>
+          <p:cNvSpPr txBox="1"/>
+          <p:nvPr/>
+        </p:nvSpPr>
+        <p:spPr>
+          <a:xfrm>
+            <a:off x="8595360" y="2377440"/>
+            <a:ext cx="3200400" cy="219456"/>
+          </a:xfrm>
+          <a:prstGeom prst="rect">
+            <a:avLst/>
+          </a:prstGeom>
+          <a:noFill/>
+        </p:spPr>
+        <p:txBody>
+          <a:bodyPr wrap="square">
+            <a:spAutoFit/>
+          </a:bodyPr>
+          <a:lstStyle/>
+          <a:p>
+            <a:pPr algn="l"/>
+            <a:r>
+              <a:rPr sz="900" b="0" i="0">
+                <a:solidFill>
+                  <a:srgbClr val="1F2A37"/>
+                </a:solidFill>
+              </a:rPr>
+              <a:t>_compute_waves() groups independent work</a:t>
+            </a:r>
+          </a:p>
+        </p:txBody>
+      </p:sp>
+      <p:sp>
+        <p:nvSpPr>
+          <p:cNvPr id="48" name="TextBox 47"/>
+          <p:cNvSpPr txBox="1"/>
+          <p:nvPr/>
+        </p:nvSpPr>
+        <p:spPr>
+          <a:xfrm>
+            <a:off x="6675120" y="2651760"/>
+            <a:ext cx="1828800" cy="219456"/>
+          </a:xfrm>
+          <a:prstGeom prst="rect">
+            <a:avLst/>
+          </a:prstGeom>
+          <a:noFill/>
+        </p:spPr>
+        <p:txBody>
+          <a:bodyPr wrap="square">
+            <a:spAutoFit/>
+          </a:bodyPr>
+          <a:lstStyle/>
+          <a:p>
+            <a:pPr algn="l"/>
+            <a:r>
+              <a:rPr sz="900" b="1" i="0">
+                <a:solidFill>
+                  <a:srgbClr val="047857"/>
+                </a:solidFill>
+              </a:rPr>
+              <a:t>Adaptive Router</a:t>
+            </a:r>
+          </a:p>
+        </p:txBody>
+      </p:sp>
+      <p:sp>
+        <p:nvSpPr>
+          <p:cNvPr id="49" name="TextBox 48"/>
+          <p:cNvSpPr txBox="1"/>
+          <p:nvPr/>
+        </p:nvSpPr>
+        <p:spPr>
+          <a:xfrm>
+            <a:off x="8595360" y="2651760"/>
+            <a:ext cx="3200400" cy="219456"/>
+          </a:xfrm>
+          <a:prstGeom prst="rect">
+            <a:avLst/>
+          </a:prstGeom>
+          <a:noFill/>
+        </p:spPr>
+        <p:txBody>
+          <a:bodyPr wrap="square">
+            <a:spAutoFit/>
+          </a:bodyPr>
+          <a:lstStyle/>
+          <a:p>
+            <a:pPr algn="l"/>
+            <a:r>
+              <a:rPr sz="900" b="0" i="0">
+                <a:solidFill>
+                  <a:srgbClr val="1F2A37"/>
+                </a:solidFill>
+              </a:rPr>
+              <a:t>Q-learning: scores[task][agent], ε=0.2</a:t>
+            </a:r>
+          </a:p>
+        </p:txBody>
+      </p:sp>
+      <p:sp>
+        <p:nvSpPr>
+          <p:cNvPr id="50" name="TextBox 49"/>
+          <p:cNvSpPr txBox="1"/>
+          <p:nvPr/>
+        </p:nvSpPr>
+        <p:spPr>
+          <a:xfrm>
+            <a:off x="6675120" y="2926080"/>
+            <a:ext cx="1828800" cy="219456"/>
+          </a:xfrm>
+          <a:prstGeom prst="rect">
+            <a:avLst/>
+          </a:prstGeom>
+          <a:noFill/>
+        </p:spPr>
+        <p:txBody>
+          <a:bodyPr wrap="square">
+            <a:spAutoFit/>
+          </a:bodyPr>
+          <a:lstStyle/>
+          <a:p>
+            <a:pPr algn="l"/>
+            <a:r>
+              <a:rPr sz="900" b="1" i="0">
+                <a:solidFill>
+                  <a:srgbClr val="047857"/>
+                </a:solidFill>
+              </a:rPr>
+              <a:t>Actor-Critic</a:t>
+            </a:r>
+          </a:p>
+        </p:txBody>
+      </p:sp>
+      <p:sp>
+        <p:nvSpPr>
+          <p:cNvPr id="51" name="TextBox 50"/>
+          <p:cNvSpPr txBox="1"/>
+          <p:nvPr/>
+        </p:nvSpPr>
+        <p:spPr>
+          <a:xfrm>
+            <a:off x="8595360" y="2926080"/>
+            <a:ext cx="3200400" cy="219456"/>
+          </a:xfrm>
+          <a:prstGeom prst="rect">
+            <a:avLst/>
+          </a:prstGeom>
+          <a:noFill/>
+        </p:spPr>
+        <p:txBody>
+          <a:bodyPr wrap="square">
+            <a:spAutoFit/>
+          </a:bodyPr>
+          <a:lstStyle/>
+          <a:p>
+            <a:pPr algn="l"/>
+            <a:r>
+              <a:rPr sz="900" b="0" i="0">
+                <a:solidFill>
+                  <a:srgbClr val="1F2A37"/>
+                </a:solidFill>
+              </a:rPr>
+              <a:t>CriticAgent at 3 checkpoints (plan/code/integration)</a:t>
+            </a:r>
+          </a:p>
+        </p:txBody>
+      </p:sp>
+      <p:sp>
+        <p:nvSpPr>
+          <p:cNvPr id="52" name="TextBox 51"/>
+          <p:cNvSpPr txBox="1"/>
+          <p:nvPr/>
+        </p:nvSpPr>
+        <p:spPr>
+          <a:xfrm>
+            <a:off x="6675120" y="3200400"/>
+            <a:ext cx="1828800" cy="219456"/>
+          </a:xfrm>
+          <a:prstGeom prst="rect">
+            <a:avLst/>
+          </a:prstGeom>
+          <a:noFill/>
+        </p:spPr>
+        <p:txBody>
+          <a:bodyPr wrap="square">
+            <a:spAutoFit/>
+          </a:bodyPr>
+          <a:lstStyle/>
+          <a:p>
+            <a:pPr algn="l"/>
+            <a:r>
+              <a:rPr sz="900" b="1" i="0">
+                <a:solidFill>
+                  <a:srgbClr val="047857"/>
+                </a:solidFill>
+              </a:rPr>
+              <a:t>HITL Gates</a:t>
+            </a:r>
+          </a:p>
+        </p:txBody>
+      </p:sp>
+      <p:sp>
+        <p:nvSpPr>
+          <p:cNvPr id="53" name="TextBox 52"/>
+          <p:cNvSpPr txBox="1"/>
+          <p:nvPr/>
+        </p:nvSpPr>
+        <p:spPr>
+          <a:xfrm>
+            <a:off x="8595360" y="3200400"/>
+            <a:ext cx="3200400" cy="219456"/>
+          </a:xfrm>
+          <a:prstGeom prst="rect">
+            <a:avLst/>
+          </a:prstGeom>
+          <a:noFill/>
+        </p:spPr>
+        <p:txBody>
+          <a:bodyPr wrap="square">
+            <a:spAutoFit/>
+          </a:bodyPr>
+          <a:lstStyle/>
+          <a:p>
+            <a:pPr algn="l"/>
+            <a:r>
+              <a:rPr sz="900" b="0" i="0">
+                <a:solidFill>
+                  <a:srgbClr val="1F2A37"/>
+                </a:solidFill>
+              </a:rPr>
+              <a:t>2 mandatory stops: post-plan, post-integration</a:t>
+            </a:r>
+          </a:p>
+        </p:txBody>
+      </p:sp>
+      <p:sp>
+        <p:nvSpPr>
+          <p:cNvPr id="54" name="TextBox 53"/>
+          <p:cNvSpPr txBox="1"/>
+          <p:nvPr/>
+        </p:nvSpPr>
+        <p:spPr>
+          <a:xfrm>
+            <a:off x="6675120" y="3474720"/>
+            <a:ext cx="1828800" cy="219456"/>
+          </a:xfrm>
+          <a:prstGeom prst="rect">
+            <a:avLst/>
+          </a:prstGeom>
+          <a:noFill/>
+        </p:spPr>
+        <p:txBody>
+          <a:bodyPr wrap="square">
+            <a:spAutoFit/>
+          </a:bodyPr>
+          <a:lstStyle/>
+          <a:p>
+            <a:pPr algn="l"/>
+            <a:r>
+              <a:rPr sz="900" b="1" i="0">
+                <a:solidFill>
+                  <a:srgbClr val="047857"/>
+                </a:solidFill>
+              </a:rPr>
+              <a:t>Anti-Drift</a:t>
+            </a:r>
+          </a:p>
+        </p:txBody>
+      </p:sp>
+      <p:sp>
+        <p:nvSpPr>
+          <p:cNvPr id="55" name="TextBox 54"/>
+          <p:cNvSpPr txBox="1"/>
+          <p:nvPr/>
+        </p:nvSpPr>
+        <p:spPr>
+          <a:xfrm>
+            <a:off x="8595360" y="3474720"/>
+            <a:ext cx="3200400" cy="219456"/>
+          </a:xfrm>
+          <a:prstGeom prst="rect">
+            <a:avLst/>
+          </a:prstGeom>
+          <a:noFill/>
+        </p:spPr>
+        <p:txBody>
+          <a:bodyPr wrap="square">
+            <a:spAutoFit/>
+          </a:bodyPr>
+          <a:lstStyle/>
+          <a:p>
+            <a:pPr algn="l"/>
+            <a:r>
+              <a:rPr sz="900" b="0" i="0">
+                <a:solidFill>
+                  <a:srgbClr val="1F2A37"/>
+                </a:solidFill>
+              </a:rPr>
+              <a:t>Checkpoint after each state, BUILD_DRIFT_WARNING</a:t>
+            </a:r>
+          </a:p>
+        </p:txBody>
+      </p:sp>
+      <p:sp>
+        <p:nvSpPr>
+          <p:cNvPr id="56" name="TextBox 55"/>
+          <p:cNvSpPr txBox="1"/>
+          <p:nvPr/>
+        </p:nvSpPr>
+        <p:spPr>
+          <a:xfrm>
+            <a:off x="6675120" y="3749040"/>
+            <a:ext cx="1828800" cy="219456"/>
+          </a:xfrm>
+          <a:prstGeom prst="rect">
+            <a:avLst/>
+          </a:prstGeom>
+          <a:noFill/>
+        </p:spPr>
+        <p:txBody>
+          <a:bodyPr wrap="square">
+            <a:spAutoFit/>
+          </a:bodyPr>
+          <a:lstStyle/>
+          <a:p>
+            <a:pPr algn="l"/>
+            <a:r>
+              <a:rPr sz="900" b="1" i="0">
+                <a:solidFill>
+                  <a:srgbClr val="047857"/>
+                </a:solidFill>
+              </a:rPr>
+              <a:t>Iterative Refine</a:t>
+            </a:r>
+          </a:p>
+        </p:txBody>
+      </p:sp>
+      <p:sp>
+        <p:nvSpPr>
+          <p:cNvPr id="57" name="TextBox 56"/>
+          <p:cNvSpPr txBox="1"/>
+          <p:nvPr/>
+        </p:nvSpPr>
+        <p:spPr>
+          <a:xfrm>
+            <a:off x="8595360" y="3749040"/>
+            <a:ext cx="3200400" cy="219456"/>
+          </a:xfrm>
+          <a:prstGeom prst="rect">
+            <a:avLst/>
+          </a:prstGeom>
+          <a:noFill/>
+        </p:spPr>
+        <p:txBody>
+          <a:bodyPr wrap="square">
+            <a:spAutoFit/>
+          </a:bodyPr>
+          <a:lstStyle/>
+          <a:p>
+            <a:pPr algn="l"/>
+            <a:r>
+              <a:rPr sz="900" b="0" i="0">
+                <a:solidFill>
+                  <a:srgbClr val="1F2A37"/>
+                </a:solidFill>
+              </a:rPr>
+              <a:t>Score &lt; threshold → retry with critic feedback</a:t>
+            </a:r>
+          </a:p>
+        </p:txBody>
+      </p:sp>
+      <p:sp>
+        <p:nvSpPr>
+          <p:cNvPr id="58" name="Rectangle 57"/>
+          <p:cNvSpPr/>
+          <p:nvPr/>
+        </p:nvSpPr>
+        <p:spPr>
+          <a:xfrm>
+            <a:off x="365760" y="5852160"/>
+            <a:ext cx="11430000" cy="502920"/>
+          </a:xfrm>
+          <a:prstGeom prst="rect">
+            <a:avLst/>
+          </a:prstGeom>
+          <a:solidFill>
+            <a:srgbClr val="FFF3CC"/>
+          </a:solidFill>
+          <a:ln>
+            <a:noFill/>
+          </a:ln>
+        </p:spPr>
+        <p:style>
+          <a:lnRef idx="1">
+            <a:schemeClr val="accent1"/>
+          </a:lnRef>
+          <a:fillRef idx="3">
+            <a:schemeClr val="accent1"/>
+          </a:fillRef>
+          <a:effectRef idx="2">
+            <a:schemeClr val="accent1"/>
+          </a:effectRef>
+          <a:fontRef idx="minor">
+            <a:schemeClr val="lt1"/>
+          </a:fontRef>
+        </p:style>
+        <p:txBody>
+          <a:bodyPr rtlCol="0" anchor="ctr"/>
+          <a:lstStyle/>
+          <a:p>
+            <a:pPr algn="ctr"/>
+          </a:p>
+        </p:txBody>
+      </p:sp>
+      <p:sp>
+        <p:nvSpPr>
+          <p:cNvPr id="59" name="TextBox 58"/>
+          <p:cNvSpPr txBox="1"/>
+          <p:nvPr/>
+        </p:nvSpPr>
+        <p:spPr>
+          <a:xfrm>
+            <a:off x="457200" y="5870448"/>
+            <a:ext cx="11247120" cy="457200"/>
+          </a:xfrm>
+          <a:prstGeom prst="rect">
+            <a:avLst/>
+          </a:prstGeom>
+          <a:noFill/>
+        </p:spPr>
+        <p:txBody>
+          <a:bodyPr wrap="square">
+            <a:spAutoFit/>
+          </a:bodyPr>
+          <a:lstStyle/>
+          <a:p>
+            <a:pPr algn="l"/>
+            <a:r>
+              <a:rPr sz="1000" b="0" i="1">
+                <a:solidFill>
+                  <a:srgbClr val="1F2A37"/>
+                </a:solidFill>
+              </a:rPr>
+              <a:t>0→1 starts cold: AdaptiveRouter uses uniform scores, domain detected fresh, full workforce assembled. Every decision during the build trains the router and critic for future 1→N refinements.</a:t>
+            </a:r>
+          </a:p>
+        </p:txBody>
+      </p:sp>
+      <p:sp>
+        <p:nvSpPr>
+          <p:cNvPr id="60" name="Rectangle 59"/>
+          <p:cNvSpPr/>
+          <p:nvPr/>
+        </p:nvSpPr>
+        <p:spPr>
+          <a:xfrm>
+            <a:off x="0" y="6492240"/>
+            <a:ext cx="12188952" cy="365760"/>
+          </a:xfrm>
+          <a:prstGeom prst="rect">
+            <a:avLst/>
+          </a:prstGeom>
+          <a:solidFill>
+            <a:srgbClr val="1F2A37"/>
+          </a:solidFill>
+          <a:ln>
+            <a:noFill/>
+          </a:ln>
+        </p:spPr>
+        <p:style>
+          <a:lnRef idx="1">
+            <a:schemeClr val="accent1"/>
+          </a:lnRef>
+          <a:fillRef idx="3">
+            <a:schemeClr val="accent1"/>
+          </a:fillRef>
+          <a:effectRef idx="2">
+            <a:schemeClr val="accent1"/>
+          </a:effectRef>
+          <a:fontRef idx="minor">
+            <a:schemeClr val="lt1"/>
+          </a:fontRef>
+        </p:style>
+        <p:txBody>
+          <a:bodyPr rtlCol="0" anchor="ctr"/>
+          <a:lstStyle/>
+          <a:p>
+            <a:pPr algn="ctr"/>
+          </a:p>
+        </p:txBody>
+      </p:sp>
+      <p:sp>
+        <p:nvSpPr>
+          <p:cNvPr id="61" name="TextBox 60"/>
+          <p:cNvSpPr txBox="1"/>
+          <p:nvPr/>
+        </p:nvSpPr>
+        <p:spPr>
+          <a:xfrm>
+            <a:off x="274320" y="6510528"/>
+            <a:ext cx="8229600" cy="274320"/>
+          </a:xfrm>
+          <a:prstGeom prst="rect">
+            <a:avLst/>
+          </a:prstGeom>
+          <a:noFill/>
+        </p:spPr>
+        <p:txBody>
+          <a:bodyPr wrap="square">
+            <a:spAutoFit/>
+          </a:bodyPr>
+          <a:lstStyle/>
+          <a:p>
+            <a:pPr algn="l"/>
+            <a:r>
+              <a:rPr sz="900" b="0" i="0">
+                <a:solidFill>
+                  <a:srgbClr val="4B5563"/>
+                </a:solidFill>
+              </a:rPr>
+              <a:t>SAGE[ai] — Architecture Deep Dive | github.com/Sumanharapanahalli/sage</a:t>
+            </a:r>
+          </a:p>
+        </p:txBody>
+      </p:sp>
+    </p:spTree>
+  </p:cSld>
+  <p:clrMapOvr>
+    <a:masterClrMapping/>
+  </p:clrMapOvr>
+</p:sld>
+</file>
+
+<file path=ppt/slides/slide12.xml><?xml version="1.0" encoding="utf-8"?>
+<p:sld xmlns:a="http://schemas.openxmlformats.org/drawingml/2006/main" xmlns:p="http://schemas.openxmlformats.org/presentationml/2006/main" xmlns:r="http://schemas.openxmlformats.org/officeDocument/2006/relationships">
+  <p:cSld>
+    <p:bg>
+      <p:bgPr>
+        <a:solidFill>
+          <a:srgbClr val="FAFAFA"/>
+        </a:solidFill>
+        <a:effectLst/>
+      </p:bgPr>
+    </p:bg>
+    <p:spTree>
+      <p:nvGrpSpPr>
+        <p:cNvPr id="1" name=""/>
+        <p:cNvGrpSpPr/>
+        <p:nvPr/>
+      </p:nvGrpSpPr>
+      <p:grpSpPr/>
+      <p:sp>
+        <p:nvSpPr>
+          <p:cNvPr id="2" name="Rectangle 1"/>
+          <p:cNvSpPr/>
+          <p:nvPr/>
+        </p:nvSpPr>
+        <p:spPr>
+          <a:xfrm>
+            <a:off x="0" y="0"/>
+            <a:ext cx="12188952" cy="1325880"/>
+          </a:xfrm>
+          <a:prstGeom prst="rect">
+            <a:avLst/>
+          </a:prstGeom>
+          <a:solidFill>
+            <a:srgbClr val="1F2A37"/>
+          </a:solidFill>
+          <a:ln>
+            <a:noFill/>
+          </a:ln>
+        </p:spPr>
+        <p:style>
+          <a:lnRef idx="1">
+            <a:schemeClr val="accent1"/>
+          </a:lnRef>
+          <a:fillRef idx="3">
+            <a:schemeClr val="accent1"/>
+          </a:fillRef>
+          <a:effectRef idx="2">
+            <a:schemeClr val="accent1"/>
+          </a:effectRef>
+          <a:fontRef idx="minor">
+            <a:schemeClr val="lt1"/>
+          </a:fontRef>
+        </p:style>
+        <p:txBody>
+          <a:bodyPr rtlCol="0" anchor="ctr"/>
+          <a:lstStyle/>
+          <a:p>
+            <a:pPr algn="ctr"/>
+          </a:p>
+        </p:txBody>
+      </p:sp>
+      <p:sp>
+        <p:nvSpPr>
+          <p:cNvPr id="3" name="TextBox 2"/>
+          <p:cNvSpPr txBox="1"/>
+          <p:nvPr/>
+        </p:nvSpPr>
+        <p:spPr>
+          <a:xfrm>
+            <a:off x="411480" y="109728"/>
+            <a:ext cx="11338560" cy="731520"/>
+          </a:xfrm>
+          <a:prstGeom prst="rect">
+            <a:avLst/>
+          </a:prstGeom>
+          <a:noFill/>
+        </p:spPr>
+        <p:txBody>
+          <a:bodyPr wrap="square">
+            <a:spAutoFit/>
+          </a:bodyPr>
+          <a:lstStyle/>
+          <a:p>
+            <a:pPr algn="l"/>
+            <a:r>
+              <a:rPr sz="3000" b="1" i="0">
+                <a:solidFill>
+                  <a:srgbClr val="FFFFFF"/>
+                </a:solidFill>
+              </a:rPr>
+              <a:t>Agentic Patterns — 1→N Incremental Refinement</a:t>
+            </a:r>
+          </a:p>
+        </p:txBody>
+      </p:sp>
+      <p:sp>
+        <p:nvSpPr>
+          <p:cNvPr id="4" name="TextBox 3"/>
+          <p:cNvSpPr txBox="1"/>
+          <p:nvPr/>
+        </p:nvSpPr>
+        <p:spPr>
+          <a:xfrm>
+            <a:off x="411480" y="804672"/>
+            <a:ext cx="11338560" cy="438912"/>
+          </a:xfrm>
+          <a:prstGeom prst="rect">
+            <a:avLst/>
+          </a:prstGeom>
+          <a:noFill/>
+        </p:spPr>
+        <p:txBody>
+          <a:bodyPr wrap="square">
+            <a:spAutoFit/>
+          </a:bodyPr>
+          <a:lstStyle/>
+          <a:p>
+            <a:pPr algn="l"/>
+            <a:r>
+              <a:rPr sz="1600" b="0" i="0">
+                <a:solidFill>
+                  <a:srgbClr val="047857"/>
+                </a:solidFill>
+              </a:rPr>
+              <a:t>Same orchestrator, scoped to changes. Router warm. Critic calibrated. Intelligence compounds.</a:t>
+            </a:r>
+          </a:p>
+        </p:txBody>
+      </p:sp>
+      <p:sp>
+        <p:nvSpPr>
+          <p:cNvPr id="5" name="Rectangle 4"/>
+          <p:cNvSpPr/>
+          <p:nvPr/>
+        </p:nvSpPr>
+        <p:spPr>
+          <a:xfrm>
+            <a:off x="365760" y="1508760"/>
+            <a:ext cx="2743200" cy="256032"/>
+          </a:xfrm>
+          <a:prstGeom prst="rect">
+            <a:avLst/>
+          </a:prstGeom>
+          <a:solidFill>
+            <a:srgbClr val="10B981"/>
+          </a:solidFill>
+          <a:ln>
+            <a:noFill/>
+          </a:ln>
+        </p:spPr>
+        <p:style>
+          <a:lnRef idx="1">
+            <a:schemeClr val="accent1"/>
+          </a:lnRef>
+          <a:fillRef idx="3">
+            <a:schemeClr val="accent1"/>
+          </a:fillRef>
+          <a:effectRef idx="2">
+            <a:schemeClr val="accent1"/>
+          </a:effectRef>
+          <a:fontRef idx="minor">
+            <a:schemeClr val="lt1"/>
+          </a:fontRef>
+        </p:style>
+        <p:txBody>
+          <a:bodyPr rtlCol="0" anchor="ctr"/>
+          <a:lstStyle/>
+          <a:p>
+            <a:pPr algn="ctr"/>
+          </a:p>
+        </p:txBody>
+      </p:sp>
+      <p:sp>
+        <p:nvSpPr>
+          <p:cNvPr id="6" name="TextBox 5"/>
+          <p:cNvSpPr txBox="1"/>
+          <p:nvPr/>
+        </p:nvSpPr>
+        <p:spPr>
+          <a:xfrm>
+            <a:off x="420624" y="1527048"/>
+            <a:ext cx="2633472" cy="219456"/>
+          </a:xfrm>
+          <a:prstGeom prst="rect">
+            <a:avLst/>
+          </a:prstGeom>
+          <a:noFill/>
+        </p:spPr>
+        <p:txBody>
+          <a:bodyPr wrap="square">
+            <a:spAutoFit/>
+          </a:bodyPr>
+          <a:lstStyle/>
+          <a:p>
+            <a:pPr algn="ctr"/>
+            <a:r>
+              <a:rPr sz="1000" b="1" i="0">
+                <a:solidFill>
+                  <a:srgbClr val="FFFFFF"/>
+                </a:solidFill>
+              </a:rPr>
+              <a:t>How 1→N Differs from 0→1</a:t>
+            </a:r>
+          </a:p>
+        </p:txBody>
+      </p:sp>
+      <p:sp>
+        <p:nvSpPr>
+          <p:cNvPr id="7" name="TextBox 6"/>
+          <p:cNvSpPr txBox="1"/>
+          <p:nvPr/>
+        </p:nvSpPr>
+        <p:spPr>
+          <a:xfrm>
+            <a:off x="457200" y="1828800"/>
+            <a:ext cx="1645920" cy="219456"/>
+          </a:xfrm>
+          <a:prstGeom prst="rect">
+            <a:avLst/>
+          </a:prstGeom>
+          <a:noFill/>
+        </p:spPr>
+        <p:txBody>
+          <a:bodyPr wrap="square">
+            <a:spAutoFit/>
+          </a:bodyPr>
+          <a:lstStyle/>
+          <a:p>
+            <a:pPr algn="l"/>
+            <a:r>
+              <a:rPr sz="1000" b="1" i="0">
+                <a:solidFill>
+                  <a:srgbClr val="047857"/>
+                </a:solidFill>
+              </a:rPr>
+              <a:t>Domain</a:t>
+            </a:r>
+          </a:p>
+        </p:txBody>
+      </p:sp>
+      <p:sp>
+        <p:nvSpPr>
+          <p:cNvPr id="8" name="TextBox 7"/>
+          <p:cNvSpPr txBox="1"/>
+          <p:nvPr/>
+        </p:nvSpPr>
+        <p:spPr>
+          <a:xfrm>
+            <a:off x="2194560" y="1828800"/>
+            <a:ext cx="4114800" cy="219456"/>
+          </a:xfrm>
+          <a:prstGeom prst="rect">
+            <a:avLst/>
+          </a:prstGeom>
+          <a:noFill/>
+        </p:spPr>
+        <p:txBody>
+          <a:bodyPr wrap="square">
+            <a:spAutoFit/>
+          </a:bodyPr>
+          <a:lstStyle/>
+          <a:p>
+            <a:pPr algn="l"/>
+            <a:r>
+              <a:rPr sz="1000" b="0" i="0">
+                <a:solidFill>
+                  <a:srgbClr val="1F2A37"/>
+                </a:solidFill>
+              </a:rPr>
+              <a:t>Already known — skips detection</a:t>
+            </a:r>
+          </a:p>
+        </p:txBody>
+      </p:sp>
+      <p:sp>
+        <p:nvSpPr>
+          <p:cNvPr id="9" name="TextBox 8"/>
+          <p:cNvSpPr txBox="1"/>
+          <p:nvPr/>
+        </p:nvSpPr>
+        <p:spPr>
+          <a:xfrm>
+            <a:off x="457200" y="2103120"/>
+            <a:ext cx="1645920" cy="219456"/>
+          </a:xfrm>
+          <a:prstGeom prst="rect">
+            <a:avLst/>
+          </a:prstGeom>
+          <a:noFill/>
+        </p:spPr>
+        <p:txBody>
+          <a:bodyPr wrap="square">
+            <a:spAutoFit/>
+          </a:bodyPr>
+          <a:lstStyle/>
+          <a:p>
+            <a:pPr algn="l"/>
+            <a:r>
+              <a:rPr sz="1000" b="1" i="0">
+                <a:solidFill>
+                  <a:srgbClr val="047857"/>
+                </a:solidFill>
+              </a:rPr>
+              <a:t>Workforce</a:t>
+            </a:r>
+          </a:p>
+        </p:txBody>
+      </p:sp>
+      <p:sp>
+        <p:nvSpPr>
+          <p:cNvPr id="10" name="TextBox 9"/>
+          <p:cNvSpPr txBox="1"/>
+          <p:nvPr/>
+        </p:nvSpPr>
+        <p:spPr>
+          <a:xfrm>
+            <a:off x="2194560" y="2103120"/>
+            <a:ext cx="4114800" cy="219456"/>
+          </a:xfrm>
+          <a:prstGeom prst="rect">
+            <a:avLst/>
+          </a:prstGeom>
+          <a:noFill/>
+        </p:spPr>
+        <p:txBody>
+          <a:bodyPr wrap="square">
+            <a:spAutoFit/>
+          </a:bodyPr>
+          <a:lstStyle/>
+          <a:p>
+            <a:pPr algn="l"/>
+            <a:r>
+              <a:rPr sz="1000" b="0" i="0">
+                <a:solidFill>
+                  <a:srgbClr val="1F2A37"/>
+                </a:solidFill>
+              </a:rPr>
+              <a:t>Stable — router has learned agent strengths</a:t>
+            </a:r>
+          </a:p>
+        </p:txBody>
+      </p:sp>
+      <p:sp>
+        <p:nvSpPr>
+          <p:cNvPr id="11" name="TextBox 10"/>
+          <p:cNvSpPr txBox="1"/>
+          <p:nvPr/>
+        </p:nvSpPr>
+        <p:spPr>
+          <a:xfrm>
+            <a:off x="457200" y="2377440"/>
+            <a:ext cx="1645920" cy="219456"/>
+          </a:xfrm>
+          <a:prstGeom prst="rect">
+            <a:avLst/>
+          </a:prstGeom>
+          <a:noFill/>
+        </p:spPr>
+        <p:txBody>
+          <a:bodyPr wrap="square">
+            <a:spAutoFit/>
+          </a:bodyPr>
+          <a:lstStyle/>
+          <a:p>
+            <a:pPr algn="l"/>
+            <a:r>
+              <a:rPr sz="1000" b="1" i="0">
+                <a:solidFill>
+                  <a:srgbClr val="047857"/>
+                </a:solidFill>
+              </a:rPr>
+              <a:t>Decomposition</a:t>
+            </a:r>
+          </a:p>
+        </p:txBody>
+      </p:sp>
+      <p:sp>
+        <p:nvSpPr>
+          <p:cNvPr id="12" name="TextBox 11"/>
+          <p:cNvSpPr txBox="1"/>
+          <p:nvPr/>
+        </p:nvSpPr>
+        <p:spPr>
+          <a:xfrm>
+            <a:off x="2194560" y="2377440"/>
+            <a:ext cx="4114800" cy="219456"/>
+          </a:xfrm>
+          <a:prstGeom prst="rect">
+            <a:avLst/>
+          </a:prstGeom>
+          <a:noFill/>
+        </p:spPr>
+        <p:txBody>
+          <a:bodyPr wrap="square">
+            <a:spAutoFit/>
+          </a:bodyPr>
+          <a:lstStyle/>
+          <a:p>
+            <a:pPr algn="l"/>
+            <a:r>
+              <a:rPr sz="1000" b="0" i="0">
+                <a:solidFill>
+                  <a:srgbClr val="1F2A37"/>
+                </a:solidFill>
+              </a:rPr>
+              <a:t>Scoped to the change, not the whole product</a:t>
+            </a:r>
+          </a:p>
+        </p:txBody>
+      </p:sp>
+      <p:sp>
+        <p:nvSpPr>
+          <p:cNvPr id="13" name="TextBox 12"/>
+          <p:cNvSpPr txBox="1"/>
+          <p:nvPr/>
+        </p:nvSpPr>
+        <p:spPr>
+          <a:xfrm>
+            <a:off x="457200" y="2651760"/>
+            <a:ext cx="1645920" cy="219456"/>
+          </a:xfrm>
+          <a:prstGeom prst="rect">
+            <a:avLst/>
+          </a:prstGeom>
+          <a:noFill/>
+        </p:spPr>
+        <p:txBody>
+          <a:bodyPr wrap="square">
+            <a:spAutoFit/>
+          </a:bodyPr>
+          <a:lstStyle/>
+          <a:p>
+            <a:pPr algn="l"/>
+            <a:r>
+              <a:rPr sz="1000" b="1" i="0">
+                <a:solidFill>
+                  <a:srgbClr val="047857"/>
+                </a:solidFill>
+              </a:rPr>
+              <a:t>Router Scores</a:t>
+            </a:r>
+          </a:p>
+        </p:txBody>
+      </p:sp>
+      <p:sp>
+        <p:nvSpPr>
+          <p:cNvPr id="14" name="TextBox 13"/>
+          <p:cNvSpPr txBox="1"/>
+          <p:nvPr/>
+        </p:nvSpPr>
+        <p:spPr>
+          <a:xfrm>
+            <a:off x="2194560" y="2651760"/>
+            <a:ext cx="4114800" cy="219456"/>
+          </a:xfrm>
+          <a:prstGeom prst="rect">
+            <a:avLst/>
+          </a:prstGeom>
+          <a:noFill/>
+        </p:spPr>
+        <p:txBody>
+          <a:bodyPr wrap="square">
+            <a:spAutoFit/>
+          </a:bodyPr>
+          <a:lstStyle/>
+          <a:p>
+            <a:pPr algn="l"/>
+            <a:r>
+              <a:rPr sz="1000" b="0" i="0">
+                <a:solidFill>
+                  <a:srgbClr val="1F2A37"/>
+                </a:solidFill>
+              </a:rPr>
+              <a:t>Warm — compounded from prior builds (EMA)</a:t>
+            </a:r>
+          </a:p>
+        </p:txBody>
+      </p:sp>
+      <p:sp>
+        <p:nvSpPr>
+          <p:cNvPr id="15" name="TextBox 14"/>
+          <p:cNvSpPr txBox="1"/>
+          <p:nvPr/>
+        </p:nvSpPr>
+        <p:spPr>
+          <a:xfrm>
+            <a:off x="457200" y="2926080"/>
+            <a:ext cx="1645920" cy="219456"/>
+          </a:xfrm>
+          <a:prstGeom prst="rect">
+            <a:avLst/>
+          </a:prstGeom>
+          <a:noFill/>
+        </p:spPr>
+        <p:txBody>
+          <a:bodyPr wrap="square">
+            <a:spAutoFit/>
+          </a:bodyPr>
+          <a:lstStyle/>
+          <a:p>
+            <a:pPr algn="l"/>
+            <a:r>
+              <a:rPr sz="1000" b="1" i="0">
+                <a:solidFill>
+                  <a:srgbClr val="047857"/>
+                </a:solidFill>
+              </a:rPr>
+              <a:t>Critic Calibration</a:t>
+            </a:r>
+          </a:p>
+        </p:txBody>
+      </p:sp>
+      <p:sp>
+        <p:nvSpPr>
+          <p:cNvPr id="16" name="TextBox 15"/>
+          <p:cNvSpPr txBox="1"/>
+          <p:nvPr/>
+        </p:nvSpPr>
+        <p:spPr>
+          <a:xfrm>
+            <a:off x="2194560" y="2926080"/>
+            <a:ext cx="4114800" cy="219456"/>
+          </a:xfrm>
+          <a:prstGeom prst="rect">
+            <a:avLst/>
+          </a:prstGeom>
+          <a:noFill/>
+        </p:spPr>
+        <p:txBody>
+          <a:bodyPr wrap="square">
+            <a:spAutoFit/>
+          </a:bodyPr>
+          <a:lstStyle/>
+          <a:p>
+            <a:pPr algn="l"/>
+            <a:r>
+              <a:rPr sz="1000" b="0" i="0">
+                <a:solidFill>
+                  <a:srgbClr val="1F2A37"/>
+                </a:solidFill>
+              </a:rPr>
+              <a:t>Higher baseline — knows existing quality</a:t>
+            </a:r>
+          </a:p>
+        </p:txBody>
+      </p:sp>
+      <p:sp>
+        <p:nvSpPr>
+          <p:cNvPr id="17" name="TextBox 16"/>
+          <p:cNvSpPr txBox="1"/>
+          <p:nvPr/>
+        </p:nvSpPr>
+        <p:spPr>
+          <a:xfrm>
+            <a:off x="457200" y="3200400"/>
+            <a:ext cx="1645920" cy="219456"/>
+          </a:xfrm>
+          <a:prstGeom prst="rect">
+            <a:avLst/>
+          </a:prstGeom>
+          <a:noFill/>
+        </p:spPr>
+        <p:txBody>
+          <a:bodyPr wrap="square">
+            <a:spAutoFit/>
+          </a:bodyPr>
+          <a:lstStyle/>
+          <a:p>
+            <a:pPr algn="l"/>
+            <a:r>
+              <a:rPr sz="1000" b="1" i="0">
+                <a:solidFill>
+                  <a:srgbClr val="047857"/>
+                </a:solidFill>
+              </a:rPr>
+              <a:t>Anti-Drift</a:t>
+            </a:r>
+          </a:p>
+        </p:txBody>
+      </p:sp>
+      <p:sp>
+        <p:nvSpPr>
+          <p:cNvPr id="18" name="TextBox 17"/>
+          <p:cNvSpPr txBox="1"/>
+          <p:nvPr/>
+        </p:nvSpPr>
+        <p:spPr>
+          <a:xfrm>
+            <a:off x="2194560" y="3200400"/>
+            <a:ext cx="4114800" cy="219456"/>
+          </a:xfrm>
+          <a:prstGeom prst="rect">
+            <a:avLst/>
+          </a:prstGeom>
+          <a:noFill/>
+        </p:spPr>
+        <p:txBody>
+          <a:bodyPr wrap="square">
+            <a:spAutoFit/>
+          </a:bodyPr>
+          <a:lstStyle/>
+          <a:p>
+            <a:pPr algn="l"/>
+            <a:r>
+              <a:rPr sz="1000" b="0" i="0">
+                <a:solidFill>
+                  <a:srgbClr val="1F2A37"/>
+                </a:solidFill>
+              </a:rPr>
+              <a:t>Compares against established baseline, not blank</a:t>
+            </a:r>
+          </a:p>
+        </p:txBody>
+      </p:sp>
+      <p:sp>
+        <p:nvSpPr>
+          <p:cNvPr id="19" name="Rectangle 18"/>
+          <p:cNvSpPr/>
+          <p:nvPr/>
+        </p:nvSpPr>
+        <p:spPr>
+          <a:xfrm>
+            <a:off x="6583680" y="1508760"/>
+            <a:ext cx="2743200" cy="256032"/>
+          </a:xfrm>
+          <a:prstGeom prst="rect">
+            <a:avLst/>
+          </a:prstGeom>
+          <a:solidFill>
+            <a:srgbClr val="10B981"/>
+          </a:solidFill>
+          <a:ln>
+            <a:noFill/>
+          </a:ln>
+        </p:spPr>
+        <p:style>
+          <a:lnRef idx="1">
+            <a:schemeClr val="accent1"/>
+          </a:lnRef>
+          <a:fillRef idx="3">
+            <a:schemeClr val="accent1"/>
+          </a:fillRef>
+          <a:effectRef idx="2">
+            <a:schemeClr val="accent1"/>
+          </a:effectRef>
+          <a:fontRef idx="minor">
+            <a:schemeClr val="lt1"/>
+          </a:fontRef>
+        </p:style>
+        <p:txBody>
+          <a:bodyPr rtlCol="0" anchor="ctr"/>
+          <a:lstStyle/>
+          <a:p>
+            <a:pPr algn="ctr"/>
+          </a:p>
+        </p:txBody>
+      </p:sp>
+      <p:sp>
+        <p:nvSpPr>
+          <p:cNvPr id="20" name="TextBox 19"/>
+          <p:cNvSpPr txBox="1"/>
+          <p:nvPr/>
+        </p:nvSpPr>
+        <p:spPr>
+          <a:xfrm>
+            <a:off x="6638544" y="1527048"/>
+            <a:ext cx="2633472" cy="219456"/>
+          </a:xfrm>
+          <a:prstGeom prst="rect">
+            <a:avLst/>
+          </a:prstGeom>
+          <a:noFill/>
+        </p:spPr>
+        <p:txBody>
+          <a:bodyPr wrap="square">
+            <a:spAutoFit/>
+          </a:bodyPr>
+          <a:lstStyle/>
+          <a:p>
+            <a:pPr algn="ctr"/>
+            <a:r>
+              <a:rPr sz="1000" b="1" i="0">
+                <a:solidFill>
+                  <a:srgbClr val="FFFFFF"/>
+                </a:solidFill>
+              </a:rPr>
+              <a:t>Compounding Intelligence Loop</a:t>
+            </a:r>
+          </a:p>
+        </p:txBody>
+      </p:sp>
+      <p:sp>
+        <p:nvSpPr>
+          <p:cNvPr id="21" name="Rectangle 20"/>
+          <p:cNvSpPr/>
+          <p:nvPr/>
+        </p:nvSpPr>
+        <p:spPr>
+          <a:xfrm>
+            <a:off x="6675120" y="1828800"/>
+            <a:ext cx="2011680" cy="502920"/>
+          </a:xfrm>
+          <a:prstGeom prst="rect">
+            <a:avLst/>
+          </a:prstGeom>
+          <a:solidFill>
+            <a:srgbClr val="1F2A37"/>
+          </a:solidFill>
+          <a:ln>
+            <a:noFill/>
+          </a:ln>
+        </p:spPr>
+        <p:style>
+          <a:lnRef idx="1">
+            <a:schemeClr val="accent1"/>
+          </a:lnRef>
+          <a:fillRef idx="3">
+            <a:schemeClr val="accent1"/>
+          </a:fillRef>
+          <a:effectRef idx="2">
+            <a:schemeClr val="accent1"/>
+          </a:effectRef>
+          <a:fontRef idx="minor">
+            <a:schemeClr val="lt1"/>
+          </a:fontRef>
+        </p:style>
+        <p:txBody>
+          <a:bodyPr rtlCol="0" anchor="ctr"/>
+          <a:lstStyle/>
+          <a:p>
+            <a:pPr algn="ctr"/>
+          </a:p>
+        </p:txBody>
+      </p:sp>
+      <p:sp>
+        <p:nvSpPr>
+          <p:cNvPr id="22" name="TextBox 21"/>
+          <p:cNvSpPr txBox="1"/>
+          <p:nvPr/>
+        </p:nvSpPr>
+        <p:spPr>
+          <a:xfrm>
+            <a:off x="6748272" y="1865376"/>
+            <a:ext cx="1865376" cy="429768"/>
+          </a:xfrm>
+          <a:prstGeom prst="rect">
+            <a:avLst/>
+          </a:prstGeom>
+          <a:noFill/>
+        </p:spPr>
+        <p:txBody>
+          <a:bodyPr wrap="square">
+            <a:spAutoFit/>
+          </a:bodyPr>
+          <a:lstStyle/>
+          <a:p>
+            <a:pPr algn="ctr"/>
+            <a:r>
+              <a:rPr sz="900" b="1" i="0">
+                <a:solidFill>
+                  <a:srgbClr val="FFFFFF"/>
+                </a:solidFill>
+              </a:rPr>
+              <a:t>0→1 Build</a:t>
+            </a:r>
+          </a:p>
+        </p:txBody>
+      </p:sp>
+      <p:sp>
+        <p:nvSpPr>
+          <p:cNvPr id="23" name="TextBox 22"/>
+          <p:cNvSpPr txBox="1"/>
+          <p:nvPr/>
+        </p:nvSpPr>
+        <p:spPr>
+          <a:xfrm>
+            <a:off x="8869680" y="1865376"/>
+            <a:ext cx="2743200" cy="438912"/>
+          </a:xfrm>
+          <a:prstGeom prst="rect">
+            <a:avLst/>
+          </a:prstGeom>
+          <a:noFill/>
+        </p:spPr>
+        <p:txBody>
+          <a:bodyPr wrap="square">
+            <a:spAutoFit/>
+          </a:bodyPr>
+          <a:lstStyle/>
+          <a:p>
+            <a:pPr algn="l"/>
+            <a:r>
+              <a:rPr sz="900" b="0" i="0">
+                <a:solidFill>
+                  <a:srgbClr val="1F2A37"/>
+                </a:solidFill>
+              </a:rPr>
+              <a:t>Router starts uniform
+Critic calibrates</a:t>
+            </a:r>
+          </a:p>
+        </p:txBody>
+      </p:sp>
+      <p:sp>
+        <p:nvSpPr>
+          <p:cNvPr id="24" name="TextBox 23"/>
+          <p:cNvSpPr txBox="1"/>
+          <p:nvPr/>
+        </p:nvSpPr>
+        <p:spPr>
+          <a:xfrm>
+            <a:off x="7589520" y="2331720"/>
+            <a:ext cx="365760" cy="274320"/>
+          </a:xfrm>
+          <a:prstGeom prst="rect">
+            <a:avLst/>
+          </a:prstGeom>
+          <a:noFill/>
+        </p:spPr>
+        <p:txBody>
+          <a:bodyPr wrap="square">
+            <a:spAutoFit/>
+          </a:bodyPr>
+          <a:lstStyle/>
+          <a:p>
+            <a:pPr algn="ctr"/>
+            <a:r>
+              <a:rPr sz="1800" b="1" i="0">
+                <a:solidFill>
+                  <a:srgbClr val="10B981"/>
+                </a:solidFill>
+              </a:rPr>
+              <a:t>↓</a:t>
+            </a:r>
+          </a:p>
+        </p:txBody>
+      </p:sp>
+      <p:sp>
+        <p:nvSpPr>
+          <p:cNvPr id="25" name="Rectangle 24"/>
+          <p:cNvSpPr/>
+          <p:nvPr/>
+        </p:nvSpPr>
+        <p:spPr>
+          <a:xfrm>
+            <a:off x="6675120" y="2514600"/>
+            <a:ext cx="2011680" cy="502920"/>
+          </a:xfrm>
+          <a:prstGeom prst="rect">
+            <a:avLst/>
+          </a:prstGeom>
+          <a:solidFill>
+            <a:srgbClr val="EF4444"/>
+          </a:solidFill>
+          <a:ln>
+            <a:noFill/>
+          </a:ln>
+        </p:spPr>
+        <p:style>
+          <a:lnRef idx="1">
+            <a:schemeClr val="accent1"/>
+          </a:lnRef>
+          <a:fillRef idx="3">
+            <a:schemeClr val="accent1"/>
+          </a:fillRef>
+          <a:effectRef idx="2">
+            <a:schemeClr val="accent1"/>
+          </a:effectRef>
+          <a:fontRef idx="minor">
+            <a:schemeClr val="lt1"/>
+          </a:fontRef>
+        </p:style>
+        <p:txBody>
+          <a:bodyPr rtlCol="0" anchor="ctr"/>
+          <a:lstStyle/>
+          <a:p>
+            <a:pPr algn="ctr"/>
+          </a:p>
+        </p:txBody>
+      </p:sp>
+      <p:sp>
+        <p:nvSpPr>
+          <p:cNvPr id="26" name="TextBox 25"/>
+          <p:cNvSpPr txBox="1"/>
+          <p:nvPr/>
+        </p:nvSpPr>
+        <p:spPr>
+          <a:xfrm>
+            <a:off x="6748272" y="2551176"/>
+            <a:ext cx="1865376" cy="429768"/>
+          </a:xfrm>
+          <a:prstGeom prst="rect">
+            <a:avLst/>
+          </a:prstGeom>
+          <a:noFill/>
+        </p:spPr>
+        <p:txBody>
+          <a:bodyPr wrap="square">
+            <a:spAutoFit/>
+          </a:bodyPr>
+          <a:lstStyle/>
+          <a:p>
+            <a:pPr algn="ctr"/>
+            <a:r>
+              <a:rPr sz="900" b="1" i="0">
+                <a:solidFill>
+                  <a:srgbClr val="FFFFFF"/>
+                </a:solidFill>
+              </a:rPr>
+              <a:t>Human Feedback</a:t>
+            </a:r>
+          </a:p>
+        </p:txBody>
+      </p:sp>
+      <p:sp>
+        <p:nvSpPr>
+          <p:cNvPr id="27" name="TextBox 26"/>
+          <p:cNvSpPr txBox="1"/>
+          <p:nvPr/>
+        </p:nvSpPr>
+        <p:spPr>
+          <a:xfrm>
+            <a:off x="8869680" y="2551176"/>
+            <a:ext cx="2743200" cy="438912"/>
+          </a:xfrm>
+          <a:prstGeom prst="rect">
+            <a:avLst/>
+          </a:prstGeom>
+          <a:noFill/>
+        </p:spPr>
+        <p:txBody>
+          <a:bodyPr wrap="square">
+            <a:spAutoFit/>
+          </a:bodyPr>
+          <a:lstStyle/>
+          <a:p>
+            <a:pPr algn="l"/>
+            <a:r>
+              <a:rPr sz="900" b="0" i="0">
+                <a:solidFill>
+                  <a:srgbClr val="1F2A37"/>
+                </a:solidFill>
+              </a:rPr>
+              <a:t>Approvals + rejections
+stored with reasoning</a:t>
+            </a:r>
+          </a:p>
+        </p:txBody>
+      </p:sp>
+      <p:sp>
+        <p:nvSpPr>
+          <p:cNvPr id="28" name="TextBox 27"/>
+          <p:cNvSpPr txBox="1"/>
+          <p:nvPr/>
+        </p:nvSpPr>
+        <p:spPr>
+          <a:xfrm>
+            <a:off x="7589520" y="3017520"/>
+            <a:ext cx="365760" cy="274320"/>
+          </a:xfrm>
+          <a:prstGeom prst="rect">
+            <a:avLst/>
+          </a:prstGeom>
+          <a:noFill/>
+        </p:spPr>
+        <p:txBody>
+          <a:bodyPr wrap="square">
+            <a:spAutoFit/>
+          </a:bodyPr>
+          <a:lstStyle/>
+          <a:p>
+            <a:pPr algn="ctr"/>
+            <a:r>
+              <a:rPr sz="1800" b="1" i="0">
+                <a:solidFill>
+                  <a:srgbClr val="10B981"/>
+                </a:solidFill>
+              </a:rPr>
+              <a:t>↓</a:t>
+            </a:r>
+          </a:p>
+        </p:txBody>
+      </p:sp>
+      <p:sp>
+        <p:nvSpPr>
+          <p:cNvPr id="29" name="Rectangle 28"/>
+          <p:cNvSpPr/>
+          <p:nvPr/>
+        </p:nvSpPr>
+        <p:spPr>
+          <a:xfrm>
+            <a:off x="6675120" y="3200400"/>
+            <a:ext cx="2011680" cy="502920"/>
+          </a:xfrm>
+          <a:prstGeom prst="rect">
+            <a:avLst/>
+          </a:prstGeom>
+          <a:solidFill>
+            <a:srgbClr val="047857"/>
+          </a:solidFill>
+          <a:ln>
+            <a:noFill/>
+          </a:ln>
+        </p:spPr>
+        <p:style>
+          <a:lnRef idx="1">
+            <a:schemeClr val="accent1"/>
+          </a:lnRef>
+          <a:fillRef idx="3">
+            <a:schemeClr val="accent1"/>
+          </a:fillRef>
+          <a:effectRef idx="2">
+            <a:schemeClr val="accent1"/>
+          </a:effectRef>
+          <a:fontRef idx="minor">
+            <a:schemeClr val="lt1"/>
+          </a:fontRef>
+        </p:style>
+        <p:txBody>
+          <a:bodyPr rtlCol="0" anchor="ctr"/>
+          <a:lstStyle/>
+          <a:p>
+            <a:pPr algn="ctr"/>
+          </a:p>
+        </p:txBody>
+      </p:sp>
+      <p:sp>
+        <p:nvSpPr>
+          <p:cNvPr id="30" name="TextBox 29"/>
+          <p:cNvSpPr txBox="1"/>
+          <p:nvPr/>
+        </p:nvSpPr>
+        <p:spPr>
+          <a:xfrm>
+            <a:off x="6748272" y="3236976"/>
+            <a:ext cx="1865376" cy="429768"/>
+          </a:xfrm>
+          <a:prstGeom prst="rect">
+            <a:avLst/>
+          </a:prstGeom>
+          <a:noFill/>
+        </p:spPr>
+        <p:txBody>
+          <a:bodyPr wrap="square">
+            <a:spAutoFit/>
+          </a:bodyPr>
+          <a:lstStyle/>
+          <a:p>
+            <a:pPr algn="ctr"/>
+            <a:r>
+              <a:rPr sz="900" b="1" i="0">
+                <a:solidFill>
+                  <a:srgbClr val="FFFFFF"/>
+                </a:solidFill>
+              </a:rPr>
+              <a:t>Vector Store</a:t>
+            </a:r>
+          </a:p>
+        </p:txBody>
+      </p:sp>
+      <p:sp>
+        <p:nvSpPr>
+          <p:cNvPr id="31" name="TextBox 30"/>
+          <p:cNvSpPr txBox="1"/>
+          <p:nvPr/>
+        </p:nvSpPr>
+        <p:spPr>
+          <a:xfrm>
+            <a:off x="8869680" y="3236976"/>
+            <a:ext cx="2743200" cy="438912"/>
+          </a:xfrm>
+          <a:prstGeom prst="rect">
+            <a:avLst/>
+          </a:prstGeom>
+          <a:noFill/>
+        </p:spPr>
+        <p:txBody>
+          <a:bodyPr wrap="square">
+            <a:spAutoFit/>
+          </a:bodyPr>
+          <a:lstStyle/>
+          <a:p>
+            <a:pPr algn="l"/>
+            <a:r>
+              <a:rPr sz="900" b="0" i="0">
+                <a:solidFill>
+                  <a:srgbClr val="1F2A37"/>
+                </a:solidFill>
+              </a:rPr>
+              <a:t>Prior decisions retrieved
+for next context</a:t>
+            </a:r>
+          </a:p>
+        </p:txBody>
+      </p:sp>
+      <p:sp>
+        <p:nvSpPr>
+          <p:cNvPr id="32" name="TextBox 31"/>
+          <p:cNvSpPr txBox="1"/>
+          <p:nvPr/>
+        </p:nvSpPr>
+        <p:spPr>
+          <a:xfrm>
+            <a:off x="7589520" y="3703320"/>
+            <a:ext cx="365760" cy="274320"/>
+          </a:xfrm>
+          <a:prstGeom prst="rect">
+            <a:avLst/>
+          </a:prstGeom>
+          <a:noFill/>
+        </p:spPr>
+        <p:txBody>
+          <a:bodyPr wrap="square">
+            <a:spAutoFit/>
+          </a:bodyPr>
+          <a:lstStyle/>
+          <a:p>
+            <a:pPr algn="ctr"/>
+            <a:r>
+              <a:rPr sz="1800" b="1" i="0">
+                <a:solidFill>
+                  <a:srgbClr val="10B981"/>
+                </a:solidFill>
+              </a:rPr>
+              <a:t>↓</a:t>
+            </a:r>
+          </a:p>
+        </p:txBody>
+      </p:sp>
+      <p:sp>
+        <p:nvSpPr>
+          <p:cNvPr id="33" name="Rectangle 32"/>
+          <p:cNvSpPr/>
+          <p:nvPr/>
+        </p:nvSpPr>
+        <p:spPr>
+          <a:xfrm>
+            <a:off x="6675120" y="3886200"/>
+            <a:ext cx="2011680" cy="502920"/>
+          </a:xfrm>
+          <a:prstGeom prst="rect">
+            <a:avLst/>
+          </a:prstGeom>
+          <a:solidFill>
+            <a:srgbClr val="10B981"/>
+          </a:solidFill>
+          <a:ln>
+            <a:noFill/>
+          </a:ln>
+        </p:spPr>
+        <p:style>
+          <a:lnRef idx="1">
+            <a:schemeClr val="accent1"/>
+          </a:lnRef>
+          <a:fillRef idx="3">
+            <a:schemeClr val="accent1"/>
+          </a:fillRef>
+          <a:effectRef idx="2">
+            <a:schemeClr val="accent1"/>
+          </a:effectRef>
+          <a:fontRef idx="minor">
+            <a:schemeClr val="lt1"/>
+          </a:fontRef>
+        </p:style>
+        <p:txBody>
+          <a:bodyPr rtlCol="0" anchor="ctr"/>
+          <a:lstStyle/>
+          <a:p>
+            <a:pPr algn="ctr"/>
+          </a:p>
+        </p:txBody>
+      </p:sp>
+      <p:sp>
+        <p:nvSpPr>
+          <p:cNvPr id="34" name="TextBox 33"/>
+          <p:cNvSpPr txBox="1"/>
+          <p:nvPr/>
+        </p:nvSpPr>
+        <p:spPr>
+          <a:xfrm>
+            <a:off x="6748272" y="3922776"/>
+            <a:ext cx="1865376" cy="429768"/>
+          </a:xfrm>
+          <a:prstGeom prst="rect">
+            <a:avLst/>
+          </a:prstGeom>
+          <a:noFill/>
+        </p:spPr>
+        <p:txBody>
+          <a:bodyPr wrap="square">
+            <a:spAutoFit/>
+          </a:bodyPr>
+          <a:lstStyle/>
+          <a:p>
+            <a:pPr algn="ctr"/>
+            <a:r>
+              <a:rPr sz="900" b="1" i="0">
+                <a:solidFill>
+                  <a:srgbClr val="FFFFFF"/>
+                </a:solidFill>
+              </a:rPr>
+              <a:t>1→N Refinement</a:t>
+            </a:r>
+          </a:p>
+        </p:txBody>
+      </p:sp>
+      <p:sp>
+        <p:nvSpPr>
+          <p:cNvPr id="35" name="TextBox 34"/>
+          <p:cNvSpPr txBox="1"/>
+          <p:nvPr/>
+        </p:nvSpPr>
+        <p:spPr>
+          <a:xfrm>
+            <a:off x="8869680" y="3922776"/>
+            <a:ext cx="2743200" cy="438912"/>
+          </a:xfrm>
+          <a:prstGeom prst="rect">
+            <a:avLst/>
+          </a:prstGeom>
+          <a:noFill/>
+        </p:spPr>
+        <p:txBody>
+          <a:bodyPr wrap="square">
+            <a:spAutoFit/>
+          </a:bodyPr>
+          <a:lstStyle/>
+          <a:p>
+            <a:pPr algn="l"/>
+            <a:r>
+              <a:rPr sz="900" b="0" i="0">
+                <a:solidFill>
+                  <a:srgbClr val="1F2A37"/>
+                </a:solidFill>
+              </a:rPr>
+              <a:t>Router warm, critic tuned
+Faster + higher quality</a:t>
+            </a:r>
+          </a:p>
+        </p:txBody>
+      </p:sp>
+      <p:sp>
+        <p:nvSpPr>
+          <p:cNvPr id="36" name="TextBox 35"/>
+          <p:cNvSpPr txBox="1"/>
+          <p:nvPr/>
+        </p:nvSpPr>
+        <p:spPr>
+          <a:xfrm>
+            <a:off x="9601200" y="4434840"/>
+            <a:ext cx="1828800" cy="274320"/>
+          </a:xfrm>
+          <a:prstGeom prst="rect">
+            <a:avLst/>
+          </a:prstGeom>
+          <a:noFill/>
+        </p:spPr>
+        <p:txBody>
+          <a:bodyPr wrap="square">
+            <a:spAutoFit/>
+          </a:bodyPr>
+          <a:lstStyle/>
+          <a:p>
+            <a:pPr algn="l"/>
+            <a:r>
+              <a:rPr sz="900" b="1" i="0">
+                <a:solidFill>
+                  <a:srgbClr val="10B981"/>
+                </a:solidFill>
+              </a:rPr>
+              <a:t>↻ compounds back</a:t>
+            </a:r>
+          </a:p>
+        </p:txBody>
+      </p:sp>
+      <p:sp>
+        <p:nvSpPr>
+          <p:cNvPr id="37" name="Rectangle 36"/>
+          <p:cNvSpPr/>
+          <p:nvPr/>
+        </p:nvSpPr>
+        <p:spPr>
+          <a:xfrm>
+            <a:off x="365760" y="3931920"/>
+            <a:ext cx="1645920" cy="256032"/>
+          </a:xfrm>
+          <a:prstGeom prst="rect">
+            <a:avLst/>
+          </a:prstGeom>
+          <a:solidFill>
+            <a:srgbClr val="10B981"/>
+          </a:solidFill>
+          <a:ln>
+            <a:noFill/>
+          </a:ln>
+        </p:spPr>
+        <p:style>
+          <a:lnRef idx="1">
+            <a:schemeClr val="accent1"/>
+          </a:lnRef>
+          <a:fillRef idx="3">
+            <a:schemeClr val="accent1"/>
+          </a:fillRef>
+          <a:effectRef idx="2">
+            <a:schemeClr val="accent1"/>
+          </a:effectRef>
+          <a:fontRef idx="minor">
+            <a:schemeClr val="lt1"/>
+          </a:fontRef>
+        </p:style>
+        <p:txBody>
+          <a:bodyPr rtlCol="0" anchor="ctr"/>
+          <a:lstStyle/>
+          <a:p>
+            <a:pPr algn="ctr"/>
+          </a:p>
+        </p:txBody>
+      </p:sp>
+      <p:sp>
+        <p:nvSpPr>
+          <p:cNvPr id="38" name="TextBox 37"/>
+          <p:cNvSpPr txBox="1"/>
+          <p:nvPr/>
+        </p:nvSpPr>
+        <p:spPr>
+          <a:xfrm>
+            <a:off x="420624" y="3950208"/>
+            <a:ext cx="1536192" cy="219456"/>
+          </a:xfrm>
+          <a:prstGeom prst="rect">
+            <a:avLst/>
+          </a:prstGeom>
+          <a:noFill/>
+        </p:spPr>
+        <p:txBody>
+          <a:bodyPr wrap="square">
+            <a:spAutoFit/>
+          </a:bodyPr>
+          <a:lstStyle/>
+          <a:p>
+            <a:pPr algn="ctr"/>
+            <a:r>
+              <a:rPr sz="1000" b="1" i="0">
+                <a:solidFill>
+                  <a:srgbClr val="FFFFFF"/>
+                </a:solidFill>
+              </a:rPr>
+              <a:t>1→N Triggers</a:t>
+            </a:r>
+          </a:p>
+        </p:txBody>
+      </p:sp>
+      <p:sp>
+        <p:nvSpPr>
+          <p:cNvPr id="39" name="TextBox 38"/>
+          <p:cNvSpPr txBox="1"/>
+          <p:nvPr/>
+        </p:nvSpPr>
+        <p:spPr>
+          <a:xfrm>
+            <a:off x="457200" y="4251960"/>
+            <a:ext cx="5943600" cy="237744"/>
+          </a:xfrm>
+          <a:prstGeom prst="rect">
+            <a:avLst/>
+          </a:prstGeom>
+          <a:noFill/>
+        </p:spPr>
+        <p:txBody>
+          <a:bodyPr wrap="square">
+            <a:spAutoFit/>
+          </a:bodyPr>
+          <a:lstStyle/>
+          <a:p>
+            <a:pPr algn="l"/>
+            <a:r>
+              <a:rPr sz="1000" b="0" i="0">
+                <a:solidFill>
+                  <a:srgbClr val="1F2A37"/>
+                </a:solidFill>
+              </a:rPr>
+              <a:t>• Feature request (from Improvements page, scope: solution)</a:t>
+            </a:r>
+          </a:p>
+        </p:txBody>
+      </p:sp>
+      <p:sp>
+        <p:nvSpPr>
+          <p:cNvPr id="40" name="TextBox 39"/>
+          <p:cNvSpPr txBox="1"/>
+          <p:nvPr/>
+        </p:nvSpPr>
+        <p:spPr>
+          <a:xfrm>
+            <a:off x="457200" y="4489704"/>
+            <a:ext cx="5943600" cy="237744"/>
+          </a:xfrm>
+          <a:prstGeom prst="rect">
+            <a:avLst/>
+          </a:prstGeom>
+          <a:noFill/>
+        </p:spPr>
+        <p:txBody>
+          <a:bodyPr wrap="square">
+            <a:spAutoFit/>
+          </a:bodyPr>
+          <a:lstStyle/>
+          <a:p>
+            <a:pPr algn="l"/>
+            <a:r>
+              <a:rPr sz="1000" b="0" i="0">
+                <a:solidFill>
+                  <a:srgbClr val="1F2A37"/>
+                </a:solidFill>
+              </a:rPr>
+              <a:t>• Bug report (from monitoring agent or human)</a:t>
+            </a:r>
+          </a:p>
+        </p:txBody>
+      </p:sp>
+      <p:sp>
+        <p:nvSpPr>
+          <p:cNvPr id="41" name="TextBox 40"/>
+          <p:cNvSpPr txBox="1"/>
+          <p:nvPr/>
+        </p:nvSpPr>
+        <p:spPr>
+          <a:xfrm>
+            <a:off x="457200" y="4727448"/>
+            <a:ext cx="5943600" cy="237744"/>
+          </a:xfrm>
+          <a:prstGeom prst="rect">
+            <a:avLst/>
+          </a:prstGeom>
+          <a:noFill/>
+        </p:spPr>
+        <p:txBody>
+          <a:bodyPr wrap="square">
+            <a:spAutoFit/>
+          </a:bodyPr>
+          <a:lstStyle/>
+          <a:p>
+            <a:pPr algn="l"/>
+            <a:r>
+              <a:rPr sz="1000" b="0" i="0">
+                <a:solidFill>
+                  <a:srgbClr val="1F2A37"/>
+                </a:solidFill>
+              </a:rPr>
+              <a:t>• Critic-identified improvement (score below threshold on re-eval)</a:t>
+            </a:r>
+          </a:p>
+        </p:txBody>
+      </p:sp>
+      <p:sp>
+        <p:nvSpPr>
+          <p:cNvPr id="42" name="TextBox 41"/>
+          <p:cNvSpPr txBox="1"/>
+          <p:nvPr/>
+        </p:nvSpPr>
+        <p:spPr>
+          <a:xfrm>
+            <a:off x="457200" y="4965192"/>
+            <a:ext cx="5943600" cy="237744"/>
+          </a:xfrm>
+          <a:prstGeom prst="rect">
+            <a:avLst/>
+          </a:prstGeom>
+          <a:noFill/>
+        </p:spPr>
+        <p:txBody>
+          <a:bodyPr wrap="square">
+            <a:spAutoFit/>
+          </a:bodyPr>
+          <a:lstStyle/>
+          <a:p>
+            <a:pPr algn="l"/>
+            <a:r>
+              <a:rPr sz="1000" b="0" i="0">
+                <a:solidFill>
+                  <a:srgbClr val="1F2A37"/>
+                </a:solidFill>
+              </a:rPr>
+              <a:t>• Human correction during approval (rejection feedback → improvement task)</a:t>
+            </a:r>
+          </a:p>
+        </p:txBody>
+      </p:sp>
+      <p:sp>
+        <p:nvSpPr>
+          <p:cNvPr id="43" name="TextBox 42"/>
+          <p:cNvSpPr txBox="1"/>
+          <p:nvPr/>
+        </p:nvSpPr>
+        <p:spPr>
+          <a:xfrm>
+            <a:off x="457200" y="5202936"/>
+            <a:ext cx="5943600" cy="237744"/>
+          </a:xfrm>
+          <a:prstGeom prst="rect">
+            <a:avLst/>
+          </a:prstGeom>
+          <a:noFill/>
+        </p:spPr>
+        <p:txBody>
+          <a:bodyPr wrap="square">
+            <a:spAutoFit/>
+          </a:bodyPr>
+          <a:lstStyle/>
+          <a:p>
+            <a:pPr algn="l"/>
+            <a:r>
+              <a:rPr sz="1000" b="0" i="0">
+                <a:solidFill>
+                  <a:srgbClr val="1F2A37"/>
+                </a:solidFill>
+              </a:rPr>
+              <a:t>• External event (Slack webhook, n8n trigger, GitHub issue)</a:t>
+            </a:r>
+          </a:p>
+        </p:txBody>
+      </p:sp>
+      <p:sp>
+        <p:nvSpPr>
+          <p:cNvPr id="44" name="Rectangle 43"/>
+          <p:cNvSpPr/>
+          <p:nvPr/>
+        </p:nvSpPr>
+        <p:spPr>
+          <a:xfrm>
+            <a:off x="365760" y="5669280"/>
+            <a:ext cx="11430000" cy="640080"/>
+          </a:xfrm>
+          <a:prstGeom prst="rect">
+            <a:avLst/>
+          </a:prstGeom>
+          <a:solidFill>
+            <a:srgbClr val="1F2A37"/>
+          </a:solidFill>
+          <a:ln>
+            <a:noFill/>
+          </a:ln>
+        </p:spPr>
+        <p:style>
+          <a:lnRef idx="1">
+            <a:schemeClr val="accent1"/>
+          </a:lnRef>
+          <a:fillRef idx="3">
+            <a:schemeClr val="accent1"/>
+          </a:fillRef>
+          <a:effectRef idx="2">
+            <a:schemeClr val="accent1"/>
+          </a:effectRef>
+          <a:fontRef idx="minor">
+            <a:schemeClr val="lt1"/>
+          </a:fontRef>
+        </p:style>
+        <p:txBody>
+          <a:bodyPr rtlCol="0" anchor="ctr"/>
+          <a:lstStyle/>
+          <a:p>
+            <a:pPr algn="ctr"/>
+          </a:p>
+        </p:txBody>
+      </p:sp>
+      <p:sp>
+        <p:nvSpPr>
+          <p:cNvPr id="45" name="TextBox 44"/>
+          <p:cNvSpPr txBox="1"/>
+          <p:nvPr/>
+        </p:nvSpPr>
+        <p:spPr>
+          <a:xfrm>
+            <a:off x="548640" y="5760720"/>
+            <a:ext cx="11064240" cy="502920"/>
+          </a:xfrm>
+          <a:prstGeom prst="rect">
+            <a:avLst/>
+          </a:prstGeom>
+          <a:noFill/>
+        </p:spPr>
+        <p:txBody>
+          <a:bodyPr wrap="square">
+            <a:spAutoFit/>
+          </a:bodyPr>
+          <a:lstStyle/>
+          <a:p>
+            <a:pPr algn="l"/>
+            <a:r>
+              <a:rPr sz="1100" b="0" i="0">
+                <a:solidFill>
+                  <a:srgbClr val="D1FAE5"/>
+                </a:solidFill>
+              </a:rPr>
+              <a:t>The same 8 patterns power both 0→1 and 1→N. The difference is state: 0→1 starts cold, 1→N starts warm. Every build makes the next one better — this is the Memento principle applied to the entire product lifecycle.</a:t>
+            </a:r>
+          </a:p>
+        </p:txBody>
+      </p:sp>
+      <p:sp>
+        <p:nvSpPr>
+          <p:cNvPr id="46" name="Rectangle 45"/>
+          <p:cNvSpPr/>
+          <p:nvPr/>
+        </p:nvSpPr>
+        <p:spPr>
+          <a:xfrm>
+            <a:off x="0" y="6492240"/>
+            <a:ext cx="12188952" cy="365760"/>
+          </a:xfrm>
+          <a:prstGeom prst="rect">
+            <a:avLst/>
+          </a:prstGeom>
+          <a:solidFill>
+            <a:srgbClr val="1F2A37"/>
+          </a:solidFill>
+          <a:ln>
+            <a:noFill/>
+          </a:ln>
+        </p:spPr>
+        <p:style>
+          <a:lnRef idx="1">
+            <a:schemeClr val="accent1"/>
+          </a:lnRef>
+          <a:fillRef idx="3">
+            <a:schemeClr val="accent1"/>
+          </a:fillRef>
+          <a:effectRef idx="2">
+            <a:schemeClr val="accent1"/>
+          </a:effectRef>
+          <a:fontRef idx="minor">
+            <a:schemeClr val="lt1"/>
+          </a:fontRef>
+        </p:style>
+        <p:txBody>
+          <a:bodyPr rtlCol="0" anchor="ctr"/>
+          <a:lstStyle/>
+          <a:p>
+            <a:pPr algn="ctr"/>
+          </a:p>
+        </p:txBody>
+      </p:sp>
+      <p:sp>
+        <p:nvSpPr>
+          <p:cNvPr id="47" name="TextBox 46"/>
           <p:cNvSpPr txBox="1"/>
           <p:nvPr/>
         </p:nvSpPr>
